--- a/Training Materials/9. Kafka/1. Kafka Messaging/Slides/1. Getting to Know Apache Kafka's Architecture/1-apache-kafka-getting-started-m1-slides.pptx
+++ b/Training Materials/9. Kafka/1. Kafka Messaging/Slides/1. Getting to Know Apache Kafka's Architecture/1-apache-kafka-getting-started-m1-slides.pptx
@@ -5,32 +5,32 @@
     <p:sldMasterId id="2147483648" r:id="rId1"/>
   </p:sldMasterIdLst>
   <p:notesMasterIdLst>
-    <p:notesMasterId r:id="rId26"/>
+    <p:notesMasterId r:id="rId25"/>
   </p:notesMasterIdLst>
   <p:sldIdLst>
-    <p:sldId id="256" r:id="rId3"/>
-    <p:sldId id="257" r:id="rId4"/>
-    <p:sldId id="258" r:id="rId5"/>
-    <p:sldId id="259" r:id="rId6"/>
-    <p:sldId id="260" r:id="rId7"/>
-    <p:sldId id="261" r:id="rId8"/>
-    <p:sldId id="262" r:id="rId9"/>
-    <p:sldId id="263" r:id="rId10"/>
-    <p:sldId id="264" r:id="rId11"/>
-    <p:sldId id="265" r:id="rId12"/>
-    <p:sldId id="266" r:id="rId13"/>
-    <p:sldId id="267" r:id="rId14"/>
-    <p:sldId id="268" r:id="rId15"/>
-    <p:sldId id="269" r:id="rId16"/>
-    <p:sldId id="270" r:id="rId17"/>
-    <p:sldId id="271" r:id="rId18"/>
-    <p:sldId id="272" r:id="rId19"/>
-    <p:sldId id="273" r:id="rId20"/>
-    <p:sldId id="274" r:id="rId21"/>
-    <p:sldId id="275" r:id="rId22"/>
-    <p:sldId id="276" r:id="rId23"/>
-    <p:sldId id="277" r:id="rId24"/>
-    <p:sldId id="278" r:id="rId25"/>
+    <p:sldId id="256" r:id="rId2"/>
+    <p:sldId id="257" r:id="rId3"/>
+    <p:sldId id="258" r:id="rId4"/>
+    <p:sldId id="259" r:id="rId5"/>
+    <p:sldId id="260" r:id="rId6"/>
+    <p:sldId id="261" r:id="rId7"/>
+    <p:sldId id="262" r:id="rId8"/>
+    <p:sldId id="263" r:id="rId9"/>
+    <p:sldId id="264" r:id="rId10"/>
+    <p:sldId id="265" r:id="rId11"/>
+    <p:sldId id="266" r:id="rId12"/>
+    <p:sldId id="267" r:id="rId13"/>
+    <p:sldId id="268" r:id="rId14"/>
+    <p:sldId id="269" r:id="rId15"/>
+    <p:sldId id="270" r:id="rId16"/>
+    <p:sldId id="271" r:id="rId17"/>
+    <p:sldId id="272" r:id="rId18"/>
+    <p:sldId id="273" r:id="rId19"/>
+    <p:sldId id="274" r:id="rId20"/>
+    <p:sldId id="275" r:id="rId21"/>
+    <p:sldId id="276" r:id="rId22"/>
+    <p:sldId id="277" r:id="rId23"/>
+    <p:sldId id="278" r:id="rId24"/>
   </p:sldIdLst>
   <p:sldSz cx="12192000" cy="6858000"/>
   <p:notesSz cx="12192000" cy="6858000"/>
@@ -126,6 +126,22 @@
       </a:defRPr>
     </a:lvl9pPr>
   </p:defaultTextStyle>
+  <p:extLst>
+    <p:ext uri="{EFAFB233-063F-42B5-8137-9DF3F51BA10A}">
+      <p15:sldGuideLst xmlns:p15="http://schemas.microsoft.com/office/powerpoint/2012/main">
+        <p15:guide id="1" orient="horz" pos="2880">
+          <p15:clr>
+            <a:srgbClr val="A4A3A4"/>
+          </p15:clr>
+        </p15:guide>
+        <p15:guide id="2" pos="2160">
+          <p15:clr>
+            <a:srgbClr val="A4A3A4"/>
+          </p15:clr>
+        </p15:guide>
+      </p15:sldGuideLst>
+    </p:ext>
+  </p:extLst>
 </p:presentation>
 </file>
 
@@ -211,6 +227,7 @@
           <a:p>
             <a:fld id="{3EFD42F7-718C-4B98-AAEC-167E6DDD60A7}" type="datetimeFigureOut">
               <a:rPr lang="en-US" smtClean="0"/>
+              <a:t>1/19/2026</a:t>
             </a:fld>
             <a:endParaRPr lang="en-US"/>
           </a:p>
@@ -274,42 +291,37 @@
           <a:p>
             <a:pPr lvl="0"/>
             <a:r>
-              <a:rPr lang="en-US" smtClean="0"/>
+              <a:rPr lang="en-US"/>
               <a:t>Click to edit Master text styles</a:t>
             </a:r>
-            <a:endParaRPr lang="en-US" smtClean="0"/>
           </a:p>
           <a:p>
             <a:pPr lvl="1"/>
             <a:r>
-              <a:rPr lang="en-US" smtClean="0"/>
+              <a:rPr lang="en-US"/>
               <a:t>Second level</a:t>
             </a:r>
-            <a:endParaRPr lang="en-US" smtClean="0"/>
           </a:p>
           <a:p>
             <a:pPr lvl="2"/>
             <a:r>
-              <a:rPr lang="en-US" smtClean="0"/>
+              <a:rPr lang="en-US"/>
               <a:t>Third level</a:t>
             </a:r>
-            <a:endParaRPr lang="en-US" smtClean="0"/>
           </a:p>
           <a:p>
             <a:pPr lvl="3"/>
             <a:r>
-              <a:rPr lang="en-US" smtClean="0"/>
+              <a:rPr lang="en-US"/>
               <a:t>Fourth level</a:t>
             </a:r>
-            <a:endParaRPr lang="en-US" smtClean="0"/>
           </a:p>
           <a:p>
             <a:pPr lvl="4"/>
             <a:r>
-              <a:rPr lang="en-US" smtClean="0"/>
+              <a:rPr lang="en-US"/>
               <a:t>Fifth level</a:t>
             </a:r>
-            <a:endParaRPr lang="en-US"/>
           </a:p>
         </p:txBody>
       </p:sp>
@@ -373,6 +385,7 @@
           <a:p>
             <a:fld id="{21B2AA4F-B828-4D7C-AFD3-893933DAFCB4}" type="slidenum">
               <a:rPr lang="en-US" smtClean="0"/>
+              <a:t>‹#›</a:t>
             </a:fld>
             <a:endParaRPr lang="en-US"/>
           </a:p>
@@ -525,7 +538,9 @@
               </a:defRPr>
             </a:lvl1pPr>
           </a:lstStyle>
-          <a:p/>
+          <a:p>
+            <a:endParaRPr/>
+          </a:p>
         </p:txBody>
       </p:sp>
       <p:sp>
@@ -556,7 +571,9 @@
               <a:defRPr/>
             </a:lvl1pPr>
           </a:lstStyle>
-          <a:p/>
+          <a:p>
+            <a:endParaRPr/>
+          </a:p>
         </p:txBody>
       </p:sp>
       <p:sp>
@@ -583,7 +600,9 @@
               </a:defRPr>
             </a:lvl1pPr>
           </a:lstStyle>
-          <a:p/>
+          <a:p>
+            <a:endParaRPr/>
+          </a:p>
         </p:txBody>
       </p:sp>
       <p:sp>
@@ -613,6 +632,7 @@
           <a:p>
             <a:fld id="{1D8BD707-D9CF-40AE-B4C6-C98DA3205C09}" type="datetimeFigureOut">
               <a:rPr lang="en-US"/>
+              <a:t>1/19/2026</a:t>
             </a:fld>
             <a:endParaRPr lang="en-US"/>
           </a:p>
@@ -645,6 +665,7 @@
           <a:p>
             <a:fld id="{B6F15528-21DE-4FAA-801E-634DDDAF4B2B}" type="slidenum">
               <a:rPr/>
+              <a:t>‹#›</a:t>
             </a:fld>
             <a:endParaRPr/>
           </a:p>
@@ -700,7 +721,9 @@
               </a:defRPr>
             </a:lvl1pPr>
           </a:lstStyle>
-          <a:p/>
+          <a:p>
+            <a:endParaRPr/>
+          </a:p>
         </p:txBody>
       </p:sp>
       <p:sp>
@@ -727,7 +750,9 @@
               </a:defRPr>
             </a:lvl1pPr>
           </a:lstStyle>
-          <a:p/>
+          <a:p>
+            <a:endParaRPr/>
+          </a:p>
         </p:txBody>
       </p:sp>
       <p:sp>
@@ -754,7 +779,9 @@
               </a:defRPr>
             </a:lvl1pPr>
           </a:lstStyle>
-          <a:p/>
+          <a:p>
+            <a:endParaRPr/>
+          </a:p>
         </p:txBody>
       </p:sp>
       <p:sp>
@@ -784,6 +811,7 @@
           <a:p>
             <a:fld id="{1D8BD707-D9CF-40AE-B4C6-C98DA3205C09}" type="datetimeFigureOut">
               <a:rPr lang="en-US"/>
+              <a:t>1/19/2026</a:t>
             </a:fld>
             <a:endParaRPr lang="en-US"/>
           </a:p>
@@ -816,6 +844,7 @@
           <a:p>
             <a:fld id="{B6F15528-21DE-4FAA-801E-634DDDAF4B2B}" type="slidenum">
               <a:rPr/>
+              <a:t>‹#›</a:t>
             </a:fld>
             <a:endParaRPr/>
           </a:p>
@@ -871,7 +900,9 @@
               </a:defRPr>
             </a:lvl1pPr>
           </a:lstStyle>
-          <a:p/>
+          <a:p>
+            <a:endParaRPr/>
+          </a:p>
         </p:txBody>
       </p:sp>
       <p:sp>
@@ -902,7 +933,9 @@
               <a:defRPr/>
             </a:lvl1pPr>
           </a:lstStyle>
-          <a:p/>
+          <a:p>
+            <a:endParaRPr/>
+          </a:p>
         </p:txBody>
       </p:sp>
       <p:sp>
@@ -933,7 +966,9 @@
               <a:defRPr/>
             </a:lvl1pPr>
           </a:lstStyle>
-          <a:p/>
+          <a:p>
+            <a:endParaRPr/>
+          </a:p>
         </p:txBody>
       </p:sp>
       <p:sp>
@@ -960,7 +995,9 @@
               </a:defRPr>
             </a:lvl1pPr>
           </a:lstStyle>
-          <a:p/>
+          <a:p>
+            <a:endParaRPr/>
+          </a:p>
         </p:txBody>
       </p:sp>
       <p:sp>
@@ -990,6 +1027,7 @@
           <a:p>
             <a:fld id="{1D8BD707-D9CF-40AE-B4C6-C98DA3205C09}" type="datetimeFigureOut">
               <a:rPr lang="en-US"/>
+              <a:t>1/19/2026</a:t>
             </a:fld>
             <a:endParaRPr lang="en-US"/>
           </a:p>
@@ -1022,6 +1060,7 @@
           <a:p>
             <a:fld id="{B6F15528-21DE-4FAA-801E-634DDDAF4B2B}" type="slidenum">
               <a:rPr/>
+              <a:t>‹#›</a:t>
             </a:fld>
             <a:endParaRPr/>
           </a:p>
@@ -1037,7 +1076,7 @@
 </file>
 
 <file path=ppt/slideLayouts/slideLayout4.xml><?xml version="1.0" encoding="utf-8"?>
-<p:sldLayout xmlns:a="http://schemas.openxmlformats.org/drawingml/2006/main" xmlns:r="http://schemas.openxmlformats.org/officeDocument/2006/relationships" xmlns:p="http://schemas.openxmlformats.org/presentationml/2006/main" type="obj" preserve="1" showMasterSp="0">
+<p:sldLayout xmlns:a="http://schemas.openxmlformats.org/drawingml/2006/main" xmlns:r="http://schemas.openxmlformats.org/officeDocument/2006/relationships" xmlns:p="http://schemas.openxmlformats.org/presentationml/2006/main" showMasterSp="0" type="obj" preserve="1">
   <p:cSld name="Title Only">
     <p:bg>
       <p:bgPr>
@@ -1098,7 +1137,9 @@
         <p:txBody>
           <a:bodyPr wrap="square" lIns="0" tIns="0" rIns="0" bIns="0" rtlCol="0"/>
           <a:lstStyle/>
-          <a:p/>
+          <a:p>
+            <a:endParaRPr/>
+          </a:p>
         </p:txBody>
       </p:sp>
       <p:sp>
@@ -1125,7 +1166,9 @@
               </a:defRPr>
             </a:lvl1pPr>
           </a:lstStyle>
-          <a:p/>
+          <a:p>
+            <a:endParaRPr/>
+          </a:p>
         </p:txBody>
       </p:sp>
       <p:sp>
@@ -1152,7 +1195,9 @@
               </a:defRPr>
             </a:lvl1pPr>
           </a:lstStyle>
-          <a:p/>
+          <a:p>
+            <a:endParaRPr/>
+          </a:p>
         </p:txBody>
       </p:sp>
       <p:sp>
@@ -1182,6 +1227,7 @@
           <a:p>
             <a:fld id="{1D8BD707-D9CF-40AE-B4C6-C98DA3205C09}" type="datetimeFigureOut">
               <a:rPr lang="en-US"/>
+              <a:t>1/19/2026</a:t>
             </a:fld>
             <a:endParaRPr lang="en-US"/>
           </a:p>
@@ -1214,6 +1260,7 @@
           <a:p>
             <a:fld id="{B6F15528-21DE-4FAA-801E-634DDDAF4B2B}" type="slidenum">
               <a:rPr/>
+              <a:t>‹#›</a:t>
             </a:fld>
             <a:endParaRPr/>
           </a:p>
@@ -1269,7 +1316,9 @@
               </a:defRPr>
             </a:lvl1pPr>
           </a:lstStyle>
-          <a:p/>
+          <a:p>
+            <a:endParaRPr/>
+          </a:p>
         </p:txBody>
       </p:sp>
       <p:sp>
@@ -1299,6 +1348,7 @@
           <a:p>
             <a:fld id="{1D8BD707-D9CF-40AE-B4C6-C98DA3205C09}" type="datetimeFigureOut">
               <a:rPr lang="en-US"/>
+              <a:t>1/19/2026</a:t>
             </a:fld>
             <a:endParaRPr lang="en-US"/>
           </a:p>
@@ -1331,6 +1381,7 @@
           <a:p>
             <a:fld id="{B6F15528-21DE-4FAA-801E-634DDDAF4B2B}" type="slidenum">
               <a:rPr/>
+              <a:t>‹#›</a:t>
             </a:fld>
             <a:endParaRPr/>
           </a:p>
@@ -1404,7 +1455,9 @@
               </a:defRPr>
             </a:lvl1pPr>
           </a:lstStyle>
-          <a:p/>
+          <a:p>
+            <a:endParaRPr/>
+          </a:p>
         </p:txBody>
       </p:sp>
       <p:sp>
@@ -1441,7 +1494,9 @@
               </a:defRPr>
             </a:lvl1pPr>
           </a:lstStyle>
-          <a:p/>
+          <a:p>
+            <a:endParaRPr/>
+          </a:p>
         </p:txBody>
       </p:sp>
       <p:sp>
@@ -1478,7 +1533,9 @@
               </a:defRPr>
             </a:lvl1pPr>
           </a:lstStyle>
-          <a:p/>
+          <a:p>
+            <a:endParaRPr/>
+          </a:p>
         </p:txBody>
       </p:sp>
       <p:sp>
@@ -1518,6 +1575,7 @@
           <a:p>
             <a:fld id="{1D8BD707-D9CF-40AE-B4C6-C98DA3205C09}" type="datetimeFigureOut">
               <a:rPr lang="en-US"/>
+              <a:t>1/19/2026</a:t>
             </a:fld>
             <a:endParaRPr lang="en-US"/>
           </a:p>
@@ -1560,6 +1618,7 @@
           <a:p>
             <a:fld id="{B6F15528-21DE-4FAA-801E-634DDDAF4B2B}" type="slidenum">
               <a:rPr/>
+              <a:t>‹#›</a:t>
             </a:fld>
             <a:endParaRPr/>
           </a:p>
@@ -1744,7 +1803,7 @@
           <p:nvPr/>
         </p:nvPicPr>
         <p:blipFill>
-          <a:blip r:embed="rId1" cstate="print"/>
+          <a:blip r:embed="rId2" cstate="print"/>
           <a:stretch>
             <a:fillRect/>
           </a:stretch>
@@ -2025,9 +2084,11 @@
         <p:spPr/>
         <p:txBody>
           <a:bodyPr/>
+          <a:lstStyle/>
           <a:p>
             <a:fld id="{B6F15528-21DE-4FAA-801E-634DDDAF4B2B}" type="slidenum">
               <a:rPr/>
+              <a:t>1</a:t>
             </a:fld>
             <a:endParaRPr/>
           </a:p>
@@ -2119,7 +2180,6 @@
               <a:rPr spc="-45" dirty="0"/>
               <a:t>Cluster</a:t>
             </a:r>
-            <a:endParaRPr spc="-45" dirty="0"/>
           </a:p>
         </p:txBody>
       </p:sp>
@@ -2352,7 +2412,9 @@
           <p:txBody>
             <a:bodyPr wrap="square" lIns="0" tIns="0" rIns="0" bIns="0" rtlCol="0"/>
             <a:lstStyle/>
-            <a:p/>
+            <a:p>
+              <a:endParaRPr/>
+            </a:p>
           </p:txBody>
         </p:sp>
         <p:sp>
@@ -2393,7 +2455,9 @@
           <p:txBody>
             <a:bodyPr wrap="square" lIns="0" tIns="0" rIns="0" bIns="0" rtlCol="0"/>
             <a:lstStyle/>
-            <a:p/>
+            <a:p>
+              <a:endParaRPr/>
+            </a:p>
           </p:txBody>
         </p:sp>
         <p:sp>
@@ -2434,7 +2498,9 @@
           <p:txBody>
             <a:bodyPr wrap="square" lIns="0" tIns="0" rIns="0" bIns="0" rtlCol="0"/>
             <a:lstStyle/>
-            <a:p/>
+            <a:p>
+              <a:endParaRPr/>
+            </a:p>
           </p:txBody>
         </p:sp>
         <p:sp>
@@ -2475,7 +2541,9 @@
           <p:txBody>
             <a:bodyPr wrap="square" lIns="0" tIns="0" rIns="0" bIns="0" rtlCol="0"/>
             <a:lstStyle/>
-            <a:p/>
+            <a:p>
+              <a:endParaRPr/>
+            </a:p>
           </p:txBody>
         </p:sp>
         <p:sp>
@@ -2516,7 +2584,9 @@
           <p:txBody>
             <a:bodyPr wrap="square" lIns="0" tIns="0" rIns="0" bIns="0" rtlCol="0"/>
             <a:lstStyle/>
-            <a:p/>
+            <a:p>
+              <a:endParaRPr/>
+            </a:p>
           </p:txBody>
         </p:sp>
         <p:sp>
@@ -2557,7 +2627,9 @@
           <p:txBody>
             <a:bodyPr wrap="square" lIns="0" tIns="0" rIns="0" bIns="0" rtlCol="0"/>
             <a:lstStyle/>
-            <a:p/>
+            <a:p>
+              <a:endParaRPr/>
+            </a:p>
           </p:txBody>
         </p:sp>
         <p:sp>
@@ -2607,7 +2679,9 @@
           <p:txBody>
             <a:bodyPr wrap="square" lIns="0" tIns="0" rIns="0" bIns="0" rtlCol="0"/>
             <a:lstStyle/>
-            <a:p/>
+            <a:p>
+              <a:endParaRPr/>
+            </a:p>
           </p:txBody>
         </p:sp>
       </p:grpSp>
@@ -2618,7 +2692,7 @@
           <p:nvPr/>
         </p:nvPicPr>
         <p:blipFill>
-          <a:blip r:embed="rId1" cstate="print"/>
+          <a:blip r:embed="rId2" cstate="print"/>
           <a:stretch>
             <a:fillRect/>
           </a:stretch>
@@ -2640,7 +2714,7 @@
           <p:nvPr/>
         </p:nvPicPr>
         <p:blipFill>
-          <a:blip r:embed="rId1" cstate="print"/>
+          <a:blip r:embed="rId2" cstate="print"/>
           <a:stretch>
             <a:fillRect/>
           </a:stretch>
@@ -2662,7 +2736,7 @@
           <p:nvPr/>
         </p:nvPicPr>
         <p:blipFill>
-          <a:blip r:embed="rId1" cstate="print"/>
+          <a:blip r:embed="rId2" cstate="print"/>
           <a:stretch>
             <a:fillRect/>
           </a:stretch>
@@ -2684,7 +2758,7 @@
           <p:nvPr/>
         </p:nvPicPr>
         <p:blipFill>
-          <a:blip r:embed="rId1" cstate="print"/>
+          <a:blip r:embed="rId2" cstate="print"/>
           <a:stretch>
             <a:fillRect/>
           </a:stretch>
@@ -2706,7 +2780,7 @@
           <p:nvPr/>
         </p:nvPicPr>
         <p:blipFill>
-          <a:blip r:embed="rId1" cstate="print"/>
+          <a:blip r:embed="rId2" cstate="print"/>
           <a:stretch>
             <a:fillRect/>
           </a:stretch>
@@ -2728,7 +2802,7 @@
           <p:nvPr/>
         </p:nvPicPr>
         <p:blipFill>
-          <a:blip r:embed="rId1" cstate="print"/>
+          <a:blip r:embed="rId2" cstate="print"/>
           <a:stretch>
             <a:fillRect/>
           </a:stretch>
@@ -2886,7 +2960,9 @@
         <p:txBody>
           <a:bodyPr wrap="square" lIns="0" tIns="0" rIns="0" bIns="0" rtlCol="0"/>
           <a:lstStyle/>
-          <a:p/>
+          <a:p>
+            <a:endParaRPr/>
+          </a:p>
         </p:txBody>
       </p:sp>
       <p:sp>
@@ -3276,7 +3352,9 @@
           <p:txBody>
             <a:bodyPr wrap="square" lIns="0" tIns="0" rIns="0" bIns="0" rtlCol="0"/>
             <a:lstStyle/>
-            <a:p/>
+            <a:p>
+              <a:endParaRPr/>
+            </a:p>
           </p:txBody>
         </p:sp>
         <p:sp>
@@ -3422,7 +3500,9 @@
           <p:txBody>
             <a:bodyPr wrap="square" lIns="0" tIns="0" rIns="0" bIns="0" rtlCol="0"/>
             <a:lstStyle/>
-            <a:p/>
+            <a:p>
+              <a:endParaRPr/>
+            </a:p>
           </p:txBody>
         </p:sp>
         <p:sp>
@@ -3470,7 +3550,9 @@
           <p:txBody>
             <a:bodyPr wrap="square" lIns="0" tIns="0" rIns="0" bIns="0" rtlCol="0"/>
             <a:lstStyle/>
-            <a:p/>
+            <a:p>
+              <a:endParaRPr/>
+            </a:p>
           </p:txBody>
         </p:sp>
         <p:sp>
@@ -3520,7 +3602,9 @@
           <p:txBody>
             <a:bodyPr wrap="square" lIns="0" tIns="0" rIns="0" bIns="0" rtlCol="0"/>
             <a:lstStyle/>
-            <a:p/>
+            <a:p>
+              <a:endParaRPr/>
+            </a:p>
           </p:txBody>
         </p:sp>
       </p:grpSp>
@@ -3629,7 +3713,9 @@
           <p:txBody>
             <a:bodyPr wrap="square" lIns="0" tIns="0" rIns="0" bIns="0" rtlCol="0"/>
             <a:lstStyle/>
-            <a:p/>
+            <a:p>
+              <a:endParaRPr/>
+            </a:p>
           </p:txBody>
         </p:sp>
         <p:sp>
@@ -3679,7 +3765,9 @@
           <p:txBody>
             <a:bodyPr wrap="square" lIns="0" tIns="0" rIns="0" bIns="0" rtlCol="0"/>
             <a:lstStyle/>
-            <a:p/>
+            <a:p>
+              <a:endParaRPr/>
+            </a:p>
           </p:txBody>
         </p:sp>
       </p:grpSp>
@@ -3736,7 +3824,7 @@
           <p:nvPr/>
         </p:nvPicPr>
         <p:blipFill>
-          <a:blip r:embed="rId2" cstate="print"/>
+          <a:blip r:embed="rId3" cstate="print"/>
           <a:stretch>
             <a:fillRect/>
           </a:stretch>
@@ -3758,7 +3846,7 @@
           <p:nvPr/>
         </p:nvPicPr>
         <p:blipFill>
-          <a:blip r:embed="rId2" cstate="print"/>
+          <a:blip r:embed="rId3" cstate="print"/>
           <a:stretch>
             <a:fillRect/>
           </a:stretch>
@@ -3786,9 +3874,11 @@
         <p:spPr/>
         <p:txBody>
           <a:bodyPr/>
+          <a:lstStyle/>
           <a:p>
             <a:fld id="{B6F15528-21DE-4FAA-801E-634DDDAF4B2B}" type="slidenum">
               <a:rPr/>
+              <a:t>10</a:t>
             </a:fld>
             <a:endParaRPr/>
           </a:p>
@@ -3840,7 +3930,7 @@
             <p:nvPr/>
           </p:nvPicPr>
           <p:blipFill>
-            <a:blip r:embed="rId1" cstate="print"/>
+            <a:blip r:embed="rId2" cstate="print"/>
             <a:stretch>
               <a:fillRect/>
             </a:stretch>
@@ -3862,7 +3952,7 @@
             <p:nvPr/>
           </p:nvPicPr>
           <p:blipFill>
-            <a:blip r:embed="rId2" cstate="print"/>
+            <a:blip r:embed="rId3" cstate="print"/>
             <a:stretch>
               <a:fillRect/>
             </a:stretch>
@@ -4035,7 +4125,6 @@
               <a:rPr spc="-45" dirty="0"/>
               <a:t>Cluster</a:t>
             </a:r>
-            <a:endParaRPr spc="-45" dirty="0"/>
           </a:p>
         </p:txBody>
       </p:sp>
@@ -4223,7 +4312,7 @@
           <p:nvPr/>
         </p:nvPicPr>
         <p:blipFill>
-          <a:blip r:embed="rId3" cstate="print"/>
+          <a:blip r:embed="rId4" cstate="print"/>
           <a:stretch>
             <a:fillRect/>
           </a:stretch>
@@ -4245,7 +4334,7 @@
           <p:nvPr/>
         </p:nvPicPr>
         <p:blipFill>
-          <a:blip r:embed="rId3" cstate="print"/>
+          <a:blip r:embed="rId4" cstate="print"/>
           <a:stretch>
             <a:fillRect/>
           </a:stretch>
@@ -4267,7 +4356,7 @@
           <p:nvPr/>
         </p:nvPicPr>
         <p:blipFill>
-          <a:blip r:embed="rId3" cstate="print"/>
+          <a:blip r:embed="rId4" cstate="print"/>
           <a:stretch>
             <a:fillRect/>
           </a:stretch>
@@ -4289,7 +4378,7 @@
           <p:nvPr/>
         </p:nvPicPr>
         <p:blipFill>
-          <a:blip r:embed="rId3" cstate="print"/>
+          <a:blip r:embed="rId4" cstate="print"/>
           <a:stretch>
             <a:fillRect/>
           </a:stretch>
@@ -4311,7 +4400,7 @@
           <p:nvPr/>
         </p:nvPicPr>
         <p:blipFill>
-          <a:blip r:embed="rId3" cstate="print"/>
+          <a:blip r:embed="rId4" cstate="print"/>
           <a:stretch>
             <a:fillRect/>
           </a:stretch>
@@ -4378,7 +4467,9 @@
           <p:txBody>
             <a:bodyPr wrap="square" lIns="0" tIns="0" rIns="0" bIns="0" rtlCol="0"/>
             <a:lstStyle/>
-            <a:p/>
+            <a:p>
+              <a:endParaRPr/>
+            </a:p>
           </p:txBody>
         </p:sp>
         <p:pic>
@@ -4388,7 +4479,7 @@
             <p:nvPr/>
           </p:nvPicPr>
           <p:blipFill>
-            <a:blip r:embed="rId3" cstate="print"/>
+            <a:blip r:embed="rId4" cstate="print"/>
             <a:stretch>
               <a:fillRect/>
             </a:stretch>
@@ -4441,7 +4532,9 @@
           <p:txBody>
             <a:bodyPr wrap="square" lIns="0" tIns="0" rIns="0" bIns="0" rtlCol="0"/>
             <a:lstStyle/>
-            <a:p/>
+            <a:p>
+              <a:endParaRPr/>
+            </a:p>
           </p:txBody>
         </p:sp>
         <p:sp>
@@ -4482,7 +4575,9 @@
           <p:txBody>
             <a:bodyPr wrap="square" lIns="0" tIns="0" rIns="0" bIns="0" rtlCol="0"/>
             <a:lstStyle/>
-            <a:p/>
+            <a:p>
+              <a:endParaRPr/>
+            </a:p>
           </p:txBody>
         </p:sp>
         <p:sp>
@@ -4523,7 +4618,9 @@
           <p:txBody>
             <a:bodyPr wrap="square" lIns="0" tIns="0" rIns="0" bIns="0" rtlCol="0"/>
             <a:lstStyle/>
-            <a:p/>
+            <a:p>
+              <a:endParaRPr/>
+            </a:p>
           </p:txBody>
         </p:sp>
         <p:sp>
@@ -4564,7 +4661,9 @@
           <p:txBody>
             <a:bodyPr wrap="square" lIns="0" tIns="0" rIns="0" bIns="0" rtlCol="0"/>
             <a:lstStyle/>
-            <a:p/>
+            <a:p>
+              <a:endParaRPr/>
+            </a:p>
           </p:txBody>
         </p:sp>
         <p:sp>
@@ -4605,7 +4704,9 @@
           <p:txBody>
             <a:bodyPr wrap="square" lIns="0" tIns="0" rIns="0" bIns="0" rtlCol="0"/>
             <a:lstStyle/>
-            <a:p/>
+            <a:p>
+              <a:endParaRPr/>
+            </a:p>
           </p:txBody>
         </p:sp>
         <p:sp>
@@ -4751,7 +4852,9 @@
           <p:txBody>
             <a:bodyPr wrap="square" lIns="0" tIns="0" rIns="0" bIns="0" rtlCol="0"/>
             <a:lstStyle/>
-            <a:p/>
+            <a:p>
+              <a:endParaRPr/>
+            </a:p>
           </p:txBody>
         </p:sp>
         <p:sp>
@@ -4897,7 +5000,9 @@
           <p:txBody>
             <a:bodyPr wrap="square" lIns="0" tIns="0" rIns="0" bIns="0" rtlCol="0"/>
             <a:lstStyle/>
-            <a:p/>
+            <a:p>
+              <a:endParaRPr/>
+            </a:p>
           </p:txBody>
         </p:sp>
       </p:grpSp>
@@ -5045,7 +5150,7 @@
         </p:nvGraphicFramePr>
         <p:xfrm>
           <a:off x="4778502" y="2642616"/>
-          <a:ext cx="2680970" cy="2275840"/>
+          <a:ext cx="2643505" cy="2250186"/>
         </p:xfrm>
         <a:graphic>
           <a:graphicData uri="http://schemas.openxmlformats.org/drawingml/2006/table">
@@ -5054,8 +5159,20 @@
                 <a:tableStyleId>{2D5ABB26-0587-4C30-8999-92F81FD0307C}</a:tableStyleId>
               </a:tblPr>
               <a:tblGrid>
-                <a:gridCol w="1323340"/>
-                <a:gridCol w="1320165"/>
+                <a:gridCol w="1323340">
+                  <a:extLst>
+                    <a:ext uri="{9D8B030D-6E8A-4147-A177-3AD203B41FA5}">
+                      <a16:colId xmlns:a16="http://schemas.microsoft.com/office/drawing/2014/main" val="20000"/>
+                    </a:ext>
+                  </a:extLst>
+                </a:gridCol>
+                <a:gridCol w="1320165">
+                  <a:extLst>
+                    <a:ext uri="{9D8B030D-6E8A-4147-A177-3AD203B41FA5}">
+                      <a16:colId xmlns:a16="http://schemas.microsoft.com/office/drawing/2014/main" val="20001"/>
+                    </a:ext>
+                  </a:extLst>
+                </a:gridCol>
               </a:tblGrid>
               <a:tr h="1097280">
                 <a:tc>
@@ -5198,6 +5315,11 @@
                     </a:solidFill>
                   </a:tcPr>
                 </a:tc>
+                <a:extLst>
+                  <a:ext uri="{0D108BD9-81ED-4DB2-BD59-A6C34878D82A}">
+                    <a16:rowId xmlns:a16="http://schemas.microsoft.com/office/drawing/2014/main" val="10000"/>
+                  </a:ext>
+                </a:extLst>
               </a:tr>
               <a:tr h="1152906">
                 <a:tc>
@@ -5340,6 +5462,11 @@
                     </a:solidFill>
                   </a:tcPr>
                 </a:tc>
+                <a:extLst>
+                  <a:ext uri="{0D108BD9-81ED-4DB2-BD59-A6C34878D82A}">
+                    <a16:rowId xmlns:a16="http://schemas.microsoft.com/office/drawing/2014/main" val="10001"/>
+                  </a:ext>
+                </a:extLst>
               </a:tr>
             </a:tbl>
           </a:graphicData>
@@ -5352,7 +5479,7 @@
           <p:nvPr/>
         </p:nvPicPr>
         <p:blipFill>
-          <a:blip r:embed="rId4" cstate="print"/>
+          <a:blip r:embed="rId5" cstate="print"/>
           <a:stretch>
             <a:fillRect/>
           </a:stretch>
@@ -5374,7 +5501,7 @@
           <p:nvPr/>
         </p:nvPicPr>
         <p:blipFill>
-          <a:blip r:embed="rId4" cstate="print"/>
+          <a:blip r:embed="rId5" cstate="print"/>
           <a:stretch>
             <a:fillRect/>
           </a:stretch>
@@ -5396,7 +5523,7 @@
           <p:nvPr/>
         </p:nvPicPr>
         <p:blipFill>
-          <a:blip r:embed="rId5" cstate="print"/>
+          <a:blip r:embed="rId6" cstate="print"/>
           <a:stretch>
             <a:fillRect/>
           </a:stretch>
@@ -5424,9 +5551,11 @@
         <p:spPr/>
         <p:txBody>
           <a:bodyPr/>
+          <a:lstStyle/>
           <a:p>
             <a:fld id="{B6F15528-21DE-4FAA-801E-634DDDAF4B2B}" type="slidenum">
               <a:rPr/>
+              <a:t>11</a:t>
             </a:fld>
             <a:endParaRPr/>
           </a:p>
@@ -5494,7 +5623,9 @@
         <p:txBody>
           <a:bodyPr wrap="square" lIns="0" tIns="0" rIns="0" bIns="0" rtlCol="0"/>
           <a:lstStyle/>
-          <a:p/>
+          <a:p>
+            <a:endParaRPr/>
+          </a:p>
         </p:txBody>
       </p:sp>
       <p:sp>
@@ -6332,7 +6463,7 @@
           <p:nvPr/>
         </p:nvPicPr>
         <p:blipFill>
-          <a:blip r:embed="rId1" cstate="print"/>
+          <a:blip r:embed="rId2" cstate="print"/>
           <a:stretch>
             <a:fillRect/>
           </a:stretch>
@@ -6392,7 +6523,6 @@
               <a:rPr spc="-100" dirty="0"/>
               <a:t>Systems</a:t>
             </a:r>
-            <a:endParaRPr spc="-100" dirty="0"/>
           </a:p>
         </p:txBody>
       </p:sp>
@@ -6512,7 +6642,9 @@
         <p:txBody>
           <a:bodyPr wrap="square" lIns="0" tIns="0" rIns="0" bIns="0" rtlCol="0"/>
           <a:lstStyle/>
-          <a:p/>
+          <a:p>
+            <a:endParaRPr/>
+          </a:p>
         </p:txBody>
       </p:sp>
       <p:sp>
@@ -6528,9 +6660,11 @@
         <p:spPr/>
         <p:txBody>
           <a:bodyPr/>
+          <a:lstStyle/>
           <a:p>
             <a:fld id="{B6F15528-21DE-4FAA-801E-634DDDAF4B2B}" type="slidenum">
               <a:rPr/>
+              <a:t>12</a:t>
             </a:fld>
             <a:endParaRPr/>
           </a:p>
@@ -6618,7 +6752,6 @@
               <a:rPr spc="15" dirty="0"/>
               <a:t>Election</a:t>
             </a:r>
-            <a:endParaRPr spc="15" dirty="0"/>
           </a:p>
         </p:txBody>
       </p:sp>
@@ -6643,7 +6776,7 @@
             <p:nvPr/>
           </p:nvPicPr>
           <p:blipFill>
-            <a:blip r:embed="rId1" cstate="print"/>
+            <a:blip r:embed="rId2" cstate="print"/>
             <a:stretch>
               <a:fillRect/>
             </a:stretch>
@@ -6665,7 +6798,7 @@
             <p:nvPr/>
           </p:nvPicPr>
           <p:blipFill>
-            <a:blip r:embed="rId1" cstate="print"/>
+            <a:blip r:embed="rId2" cstate="print"/>
             <a:stretch>
               <a:fillRect/>
             </a:stretch>
@@ -6687,7 +6820,7 @@
             <p:nvPr/>
           </p:nvPicPr>
           <p:blipFill>
-            <a:blip r:embed="rId2" cstate="print"/>
+            <a:blip r:embed="rId3" cstate="print"/>
             <a:stretch>
               <a:fillRect/>
             </a:stretch>
@@ -6709,7 +6842,7 @@
             <p:nvPr/>
           </p:nvPicPr>
           <p:blipFill>
-            <a:blip r:embed="rId3" cstate="print"/>
+            <a:blip r:embed="rId4" cstate="print"/>
             <a:stretch>
               <a:fillRect/>
             </a:stretch>
@@ -6731,7 +6864,7 @@
             <p:nvPr/>
           </p:nvPicPr>
           <p:blipFill>
-            <a:blip r:embed="rId3" cstate="print"/>
+            <a:blip r:embed="rId4" cstate="print"/>
             <a:stretch>
               <a:fillRect/>
             </a:stretch>
@@ -6753,7 +6886,7 @@
             <p:nvPr/>
           </p:nvPicPr>
           <p:blipFill>
-            <a:blip r:embed="rId3" cstate="print"/>
+            <a:blip r:embed="rId4" cstate="print"/>
             <a:stretch>
               <a:fillRect/>
             </a:stretch>
@@ -6806,7 +6939,9 @@
           <p:txBody>
             <a:bodyPr wrap="square" lIns="0" tIns="0" rIns="0" bIns="0" rtlCol="0"/>
             <a:lstStyle/>
-            <a:p/>
+            <a:p>
+              <a:endParaRPr/>
+            </a:p>
           </p:txBody>
         </p:sp>
         <p:sp>
@@ -6847,7 +6982,9 @@
           <p:txBody>
             <a:bodyPr wrap="square" lIns="0" tIns="0" rIns="0" bIns="0" rtlCol="0"/>
             <a:lstStyle/>
-            <a:p/>
+            <a:p>
+              <a:endParaRPr/>
+            </a:p>
           </p:txBody>
         </p:sp>
         <p:sp>
@@ -6888,7 +7025,9 @@
           <p:txBody>
             <a:bodyPr wrap="square" lIns="0" tIns="0" rIns="0" bIns="0" rtlCol="0"/>
             <a:lstStyle/>
-            <a:p/>
+            <a:p>
+              <a:endParaRPr/>
+            </a:p>
           </p:txBody>
         </p:sp>
       </p:grpSp>
@@ -6899,7 +7038,7 @@
           <p:nvPr/>
         </p:nvPicPr>
         <p:blipFill>
-          <a:blip r:embed="rId4" cstate="print"/>
+          <a:blip r:embed="rId5" cstate="print"/>
           <a:stretch>
             <a:fillRect/>
           </a:stretch>
@@ -6987,7 +7126,7 @@
           <p:nvPr/>
         </p:nvPicPr>
         <p:blipFill>
-          <a:blip r:embed="rId5" cstate="print"/>
+          <a:blip r:embed="rId6" cstate="print"/>
           <a:stretch>
             <a:fillRect/>
           </a:stretch>
@@ -7055,7 +7194,7 @@
           <p:nvPr/>
         </p:nvPicPr>
         <p:blipFill>
-          <a:blip r:embed="rId6" cstate="print"/>
+          <a:blip r:embed="rId7" cstate="print"/>
           <a:stretch>
             <a:fillRect/>
           </a:stretch>
@@ -7179,9 +7318,11 @@
         <p:spPr/>
         <p:txBody>
           <a:bodyPr/>
+          <a:lstStyle/>
           <a:p>
             <a:fld id="{B6F15528-21DE-4FAA-801E-634DDDAF4B2B}" type="slidenum">
               <a:rPr/>
+              <a:t>13</a:t>
             </a:fld>
             <a:endParaRPr/>
           </a:p>
@@ -7353,7 +7494,6 @@
               <a:rPr spc="-100" dirty="0"/>
               <a:t>r</a:t>
             </a:r>
-            <a:endParaRPr spc="-100" dirty="0"/>
           </a:p>
         </p:txBody>
       </p:sp>
@@ -7378,7 +7518,7 @@
             <p:nvPr/>
           </p:nvPicPr>
           <p:blipFill>
-            <a:blip r:embed="rId1" cstate="print"/>
+            <a:blip r:embed="rId2" cstate="print"/>
             <a:stretch>
               <a:fillRect/>
             </a:stretch>
@@ -7400,7 +7540,7 @@
             <p:nvPr/>
           </p:nvPicPr>
           <p:blipFill>
-            <a:blip r:embed="rId1" cstate="print"/>
+            <a:blip r:embed="rId2" cstate="print"/>
             <a:stretch>
               <a:fillRect/>
             </a:stretch>
@@ -7422,7 +7562,7 @@
             <p:nvPr/>
           </p:nvPicPr>
           <p:blipFill>
-            <a:blip r:embed="rId2" cstate="print"/>
+            <a:blip r:embed="rId3" cstate="print"/>
             <a:stretch>
               <a:fillRect/>
             </a:stretch>
@@ -7444,7 +7584,7 @@
             <p:nvPr/>
           </p:nvPicPr>
           <p:blipFill>
-            <a:blip r:embed="rId3" cstate="print"/>
+            <a:blip r:embed="rId4" cstate="print"/>
             <a:stretch>
               <a:fillRect/>
             </a:stretch>
@@ -7466,7 +7606,7 @@
             <p:nvPr/>
           </p:nvPicPr>
           <p:blipFill>
-            <a:blip r:embed="rId3" cstate="print"/>
+            <a:blip r:embed="rId4" cstate="print"/>
             <a:stretch>
               <a:fillRect/>
             </a:stretch>
@@ -7488,7 +7628,7 @@
             <p:nvPr/>
           </p:nvPicPr>
           <p:blipFill>
-            <a:blip r:embed="rId3" cstate="print"/>
+            <a:blip r:embed="rId4" cstate="print"/>
             <a:stretch>
               <a:fillRect/>
             </a:stretch>
@@ -7511,7 +7651,7 @@
           <p:nvPr/>
         </p:nvPicPr>
         <p:blipFill>
-          <a:blip r:embed="rId4" cstate="print"/>
+          <a:blip r:embed="rId5" cstate="print"/>
           <a:stretch>
             <a:fillRect/>
           </a:stretch>
@@ -7533,7 +7673,7 @@
           <p:nvPr/>
         </p:nvPicPr>
         <p:blipFill>
-          <a:blip r:embed="rId5" cstate="print"/>
+          <a:blip r:embed="rId6" cstate="print"/>
           <a:stretch>
             <a:fillRect/>
           </a:stretch>
@@ -7555,7 +7695,7 @@
           <p:nvPr/>
         </p:nvPicPr>
         <p:blipFill>
-          <a:blip r:embed="rId6" cstate="print"/>
+          <a:blip r:embed="rId7" cstate="print"/>
           <a:stretch>
             <a:fillRect/>
           </a:stretch>
@@ -7686,7 +7826,9 @@
         <p:txBody>
           <a:bodyPr wrap="square" lIns="0" tIns="0" rIns="0" bIns="0" rtlCol="0"/>
           <a:lstStyle/>
-          <a:p/>
+          <a:p>
+            <a:endParaRPr/>
+          </a:p>
         </p:txBody>
       </p:sp>
       <p:sp>
@@ -7702,9 +7844,11 @@
         <p:spPr/>
         <p:txBody>
           <a:bodyPr/>
+          <a:lstStyle/>
           <a:p>
             <a:fld id="{B6F15528-21DE-4FAA-801E-634DDDAF4B2B}" type="slidenum">
               <a:rPr/>
+              <a:t>14</a:t>
             </a:fld>
             <a:endParaRPr/>
           </a:p>
@@ -7804,7 +7948,6 @@
               <a:rPr spc="10" dirty="0"/>
               <a:t>Done</a:t>
             </a:r>
-            <a:endParaRPr spc="10" dirty="0"/>
           </a:p>
         </p:txBody>
       </p:sp>
@@ -7815,7 +7958,7 @@
           <p:nvPr/>
         </p:nvPicPr>
         <p:blipFill>
-          <a:blip r:embed="rId1" cstate="print"/>
+          <a:blip r:embed="rId2" cstate="print"/>
           <a:stretch>
             <a:fillRect/>
           </a:stretch>
@@ -7837,7 +7980,7 @@
           <p:nvPr/>
         </p:nvPicPr>
         <p:blipFill>
-          <a:blip r:embed="rId2" cstate="print"/>
+          <a:blip r:embed="rId3" cstate="print"/>
           <a:stretch>
             <a:fillRect/>
           </a:stretch>
@@ -7859,7 +8002,7 @@
           <p:nvPr/>
         </p:nvPicPr>
         <p:blipFill>
-          <a:blip r:embed="rId3" cstate="print"/>
+          <a:blip r:embed="rId4" cstate="print"/>
           <a:stretch>
             <a:fillRect/>
           </a:stretch>
@@ -7895,7 +8038,7 @@
             <p:nvPr/>
           </p:nvPicPr>
           <p:blipFill>
-            <a:blip r:embed="rId4" cstate="print"/>
+            <a:blip r:embed="rId5" cstate="print"/>
             <a:stretch>
               <a:fillRect/>
             </a:stretch>
@@ -7917,7 +8060,7 @@
             <p:nvPr/>
           </p:nvPicPr>
           <p:blipFill>
-            <a:blip r:embed="rId4" cstate="print"/>
+            <a:blip r:embed="rId5" cstate="print"/>
             <a:stretch>
               <a:fillRect/>
             </a:stretch>
@@ -7939,7 +8082,7 @@
             <p:nvPr/>
           </p:nvPicPr>
           <p:blipFill>
-            <a:blip r:embed="rId5" cstate="print"/>
+            <a:blip r:embed="rId6" cstate="print"/>
             <a:stretch>
               <a:fillRect/>
             </a:stretch>
@@ -7961,7 +8104,7 @@
             <p:nvPr/>
           </p:nvPicPr>
           <p:blipFill>
-            <a:blip r:embed="rId6" cstate="print"/>
+            <a:blip r:embed="rId7" cstate="print"/>
             <a:stretch>
               <a:fillRect/>
             </a:stretch>
@@ -7983,7 +8126,7 @@
             <p:nvPr/>
           </p:nvPicPr>
           <p:blipFill>
-            <a:blip r:embed="rId6" cstate="print"/>
+            <a:blip r:embed="rId7" cstate="print"/>
             <a:stretch>
               <a:fillRect/>
             </a:stretch>
@@ -8005,7 +8148,7 @@
             <p:nvPr/>
           </p:nvPicPr>
           <p:blipFill>
-            <a:blip r:embed="rId6" cstate="print"/>
+            <a:blip r:embed="rId7" cstate="print"/>
             <a:stretch>
               <a:fillRect/>
             </a:stretch>
@@ -8059,7 +8202,9 @@
         <p:txBody>
           <a:bodyPr wrap="square" lIns="0" tIns="0" rIns="0" bIns="0" rtlCol="0"/>
           <a:lstStyle/>
-          <a:p/>
+          <a:p>
+            <a:endParaRPr/>
+          </a:p>
         </p:txBody>
       </p:sp>
       <p:grpSp>
@@ -8083,7 +8228,7 @@
             <p:nvPr/>
           </p:nvPicPr>
           <p:blipFill>
-            <a:blip r:embed="rId7" cstate="print"/>
+            <a:blip r:embed="rId8" cstate="print"/>
             <a:stretch>
               <a:fillRect/>
             </a:stretch>
@@ -8143,7 +8288,9 @@
           <p:txBody>
             <a:bodyPr wrap="square" lIns="0" tIns="0" rIns="0" bIns="0" rtlCol="0"/>
             <a:lstStyle/>
-            <a:p/>
+            <a:p>
+              <a:endParaRPr/>
+            </a:p>
           </p:txBody>
         </p:sp>
       </p:grpSp>
@@ -8214,7 +8361,7 @@
             <p:nvPr/>
           </p:nvPicPr>
           <p:blipFill>
-            <a:blip r:embed="rId8" cstate="print"/>
+            <a:blip r:embed="rId9" cstate="print"/>
             <a:stretch>
               <a:fillRect/>
             </a:stretch>
@@ -8236,7 +8383,7 @@
             <p:nvPr/>
           </p:nvPicPr>
           <p:blipFill>
-            <a:blip r:embed="rId9" cstate="print"/>
+            <a:blip r:embed="rId10" cstate="print"/>
             <a:stretch>
               <a:fillRect/>
             </a:stretch>
@@ -8265,9 +8412,11 @@
         <p:spPr/>
         <p:txBody>
           <a:bodyPr/>
+          <a:lstStyle/>
           <a:p>
             <a:fld id="{B6F15528-21DE-4FAA-801E-634DDDAF4B2B}" type="slidenum">
               <a:rPr/>
+              <a:t>15</a:t>
             </a:fld>
             <a:endParaRPr/>
           </a:p>
@@ -8433,7 +8582,7 @@
           <p:nvPr/>
         </p:nvPicPr>
         <p:blipFill>
-          <a:blip r:embed="rId1" cstate="print"/>
+          <a:blip r:embed="rId2" cstate="print"/>
           <a:stretch>
             <a:fillRect/>
           </a:stretch>
@@ -8461,9 +8610,11 @@
         <p:spPr/>
         <p:txBody>
           <a:bodyPr/>
+          <a:lstStyle/>
           <a:p>
             <a:fld id="{B6F15528-21DE-4FAA-801E-634DDDAF4B2B}" type="slidenum">
               <a:rPr/>
+              <a:t>16</a:t>
             </a:fld>
             <a:endParaRPr/>
           </a:p>
@@ -8515,7 +8666,7 @@
             <p:nvPr/>
           </p:nvPicPr>
           <p:blipFill>
-            <a:blip r:embed="rId1" cstate="print"/>
+            <a:blip r:embed="rId2" cstate="print"/>
             <a:stretch>
               <a:fillRect/>
             </a:stretch>
@@ -8575,7 +8726,9 @@
           <p:txBody>
             <a:bodyPr wrap="square" lIns="0" tIns="0" rIns="0" bIns="0" rtlCol="0"/>
             <a:lstStyle/>
-            <a:p/>
+            <a:p>
+              <a:endParaRPr/>
+            </a:p>
           </p:txBody>
         </p:sp>
       </p:grpSp>
@@ -8656,7 +8809,7 @@
             <p:nvPr/>
           </p:nvPicPr>
           <p:blipFill>
-            <a:blip r:embed="rId2" cstate="print"/>
+            <a:blip r:embed="rId3" cstate="print"/>
             <a:stretch>
               <a:fillRect/>
             </a:stretch>
@@ -8716,7 +8869,9 @@
           <p:txBody>
             <a:bodyPr wrap="square" lIns="0" tIns="0" rIns="0" bIns="0" rtlCol="0"/>
             <a:lstStyle/>
-            <a:p/>
+            <a:p>
+              <a:endParaRPr/>
+            </a:p>
           </p:txBody>
         </p:sp>
       </p:grpSp>
@@ -8849,7 +9004,6 @@
               <a:rPr spc="-45" dirty="0"/>
               <a:t>(Reliably)</a:t>
             </a:r>
-            <a:endParaRPr spc="-45" dirty="0"/>
           </a:p>
         </p:txBody>
       </p:sp>
@@ -8874,7 +9028,7 @@
             <p:nvPr/>
           </p:nvPicPr>
           <p:blipFill>
-            <a:blip r:embed="rId3" cstate="print"/>
+            <a:blip r:embed="rId4" cstate="print"/>
             <a:stretch>
               <a:fillRect/>
             </a:stretch>
@@ -8896,7 +9050,7 @@
             <p:nvPr/>
           </p:nvPicPr>
           <p:blipFill>
-            <a:blip r:embed="rId4" cstate="print"/>
+            <a:blip r:embed="rId5" cstate="print"/>
             <a:stretch>
               <a:fillRect/>
             </a:stretch>
@@ -8949,7 +9103,9 @@
           <p:txBody>
             <a:bodyPr wrap="square" lIns="0" tIns="0" rIns="0" bIns="0" rtlCol="0"/>
             <a:lstStyle/>
-            <a:p/>
+            <a:p>
+              <a:endParaRPr/>
+            </a:p>
           </p:txBody>
         </p:sp>
         <p:sp>
@@ -8994,7 +9150,9 @@
           <p:txBody>
             <a:bodyPr wrap="square" lIns="0" tIns="0" rIns="0" bIns="0" rtlCol="0"/>
             <a:lstStyle/>
-            <a:p/>
+            <a:p>
+              <a:endParaRPr/>
+            </a:p>
           </p:txBody>
         </p:sp>
         <p:sp>
@@ -9035,7 +9193,9 @@
           <p:txBody>
             <a:bodyPr wrap="square" lIns="0" tIns="0" rIns="0" bIns="0" rtlCol="0"/>
             <a:lstStyle/>
-            <a:p/>
+            <a:p>
+              <a:endParaRPr/>
+            </a:p>
           </p:txBody>
         </p:sp>
         <p:sp>
@@ -9080,7 +9240,9 @@
           <p:txBody>
             <a:bodyPr wrap="square" lIns="0" tIns="0" rIns="0" bIns="0" rtlCol="0"/>
             <a:lstStyle/>
-            <a:p/>
+            <a:p>
+              <a:endParaRPr/>
+            </a:p>
           </p:txBody>
         </p:sp>
       </p:grpSp>
@@ -9276,7 +9438,7 @@
             <p:nvPr/>
           </p:nvPicPr>
           <p:blipFill>
-            <a:blip r:embed="rId5" cstate="print"/>
+            <a:blip r:embed="rId6" cstate="print"/>
             <a:stretch>
               <a:fillRect/>
             </a:stretch>
@@ -9336,7 +9498,9 @@
           <p:txBody>
             <a:bodyPr wrap="square" lIns="0" tIns="0" rIns="0" bIns="0" rtlCol="0"/>
             <a:lstStyle/>
-            <a:p/>
+            <a:p>
+              <a:endParaRPr/>
+            </a:p>
           </p:txBody>
         </p:sp>
       </p:grpSp>
@@ -9393,7 +9557,7 @@
           <p:nvPr/>
         </p:nvPicPr>
         <p:blipFill>
-          <a:blip r:embed="rId2" cstate="print"/>
+          <a:blip r:embed="rId3" cstate="print"/>
           <a:stretch>
             <a:fillRect/>
           </a:stretch>
@@ -9461,7 +9625,7 @@
           <p:nvPr/>
         </p:nvPicPr>
         <p:blipFill>
-          <a:blip r:embed="rId1" cstate="print"/>
+          <a:blip r:embed="rId2" cstate="print"/>
           <a:stretch>
             <a:fillRect/>
           </a:stretch>
@@ -9529,7 +9693,7 @@
           <p:nvPr/>
         </p:nvPicPr>
         <p:blipFill>
-          <a:blip r:embed="rId2" cstate="print"/>
+          <a:blip r:embed="rId3" cstate="print"/>
           <a:stretch>
             <a:fillRect/>
           </a:stretch>
@@ -9611,7 +9775,7 @@
             <p:nvPr/>
           </p:nvPicPr>
           <p:blipFill>
-            <a:blip r:embed="rId6" cstate="print"/>
+            <a:blip r:embed="rId7" cstate="print"/>
             <a:stretch>
               <a:fillRect/>
             </a:stretch>
@@ -9671,7 +9835,9 @@
           <p:txBody>
             <a:bodyPr wrap="square" lIns="0" tIns="0" rIns="0" bIns="0" rtlCol="0"/>
             <a:lstStyle/>
-            <a:p/>
+            <a:p>
+              <a:endParaRPr/>
+            </a:p>
           </p:txBody>
         </p:sp>
       </p:grpSp>
@@ -9773,7 +9939,9 @@
           <p:txBody>
             <a:bodyPr wrap="square" lIns="0" tIns="0" rIns="0" bIns="0" rtlCol="0"/>
             <a:lstStyle/>
-            <a:p/>
+            <a:p>
+              <a:endParaRPr/>
+            </a:p>
           </p:txBody>
         </p:sp>
         <p:sp>
@@ -9818,7 +9986,9 @@
           <p:txBody>
             <a:bodyPr wrap="square" lIns="0" tIns="0" rIns="0" bIns="0" rtlCol="0"/>
             <a:lstStyle/>
-            <a:p/>
+            <a:p>
+              <a:endParaRPr/>
+            </a:p>
           </p:txBody>
         </p:sp>
       </p:grpSp>
@@ -9874,7 +10044,9 @@
           <p:txBody>
             <a:bodyPr wrap="square" lIns="0" tIns="0" rIns="0" bIns="0" rtlCol="0"/>
             <a:lstStyle/>
-            <a:p/>
+            <a:p>
+              <a:endParaRPr/>
+            </a:p>
           </p:txBody>
         </p:sp>
         <p:sp>
@@ -9919,7 +10091,9 @@
           <p:txBody>
             <a:bodyPr wrap="square" lIns="0" tIns="0" rIns="0" bIns="0" rtlCol="0"/>
             <a:lstStyle/>
-            <a:p/>
+            <a:p>
+              <a:endParaRPr/>
+            </a:p>
           </p:txBody>
         </p:sp>
       </p:grpSp>
@@ -9975,7 +10149,9 @@
           <p:txBody>
             <a:bodyPr wrap="square" lIns="0" tIns="0" rIns="0" bIns="0" rtlCol="0"/>
             <a:lstStyle/>
-            <a:p/>
+            <a:p>
+              <a:endParaRPr/>
+            </a:p>
           </p:txBody>
         </p:sp>
         <p:sp>
@@ -10020,7 +10196,9 @@
           <p:txBody>
             <a:bodyPr wrap="square" lIns="0" tIns="0" rIns="0" bIns="0" rtlCol="0"/>
             <a:lstStyle/>
-            <a:p/>
+            <a:p>
+              <a:endParaRPr/>
+            </a:p>
           </p:txBody>
         </p:sp>
       </p:grpSp>
@@ -10076,7 +10254,9 @@
           <p:txBody>
             <a:bodyPr wrap="square" lIns="0" tIns="0" rIns="0" bIns="0" rtlCol="0"/>
             <a:lstStyle/>
-            <a:p/>
+            <a:p>
+              <a:endParaRPr/>
+            </a:p>
           </p:txBody>
         </p:sp>
         <p:sp>
@@ -10121,7 +10301,9 @@
           <p:txBody>
             <a:bodyPr wrap="square" lIns="0" tIns="0" rIns="0" bIns="0" rtlCol="0"/>
             <a:lstStyle/>
-            <a:p/>
+            <a:p>
+              <a:endParaRPr/>
+            </a:p>
           </p:txBody>
         </p:sp>
       </p:grpSp>
@@ -10138,9 +10320,11 @@
         <p:spPr/>
         <p:txBody>
           <a:bodyPr/>
+          <a:lstStyle/>
           <a:p>
             <a:fld id="{B6F15528-21DE-4FAA-801E-634DDDAF4B2B}" type="slidenum">
               <a:rPr/>
+              <a:t>17</a:t>
             </a:fld>
             <a:endParaRPr/>
           </a:p>
@@ -10356,7 +10540,6 @@
               <a:rPr spc="-45" dirty="0"/>
               <a:t>(Reliably)</a:t>
             </a:r>
-            <a:endParaRPr spc="-45" dirty="0"/>
           </a:p>
         </p:txBody>
       </p:sp>
@@ -10367,7 +10550,7 @@
           <p:nvPr/>
         </p:nvPicPr>
         <p:blipFill>
-          <a:blip r:embed="rId1" cstate="print"/>
+          <a:blip r:embed="rId2" cstate="print"/>
           <a:stretch>
             <a:fillRect/>
           </a:stretch>
@@ -10389,7 +10572,7 @@
           <p:nvPr/>
         </p:nvPicPr>
         <p:blipFill>
-          <a:blip r:embed="rId2" cstate="print"/>
+          <a:blip r:embed="rId3" cstate="print"/>
           <a:stretch>
             <a:fillRect/>
           </a:stretch>
@@ -10425,7 +10608,7 @@
             <p:nvPr/>
           </p:nvPicPr>
           <p:blipFill>
-            <a:blip r:embed="rId3" cstate="print"/>
+            <a:blip r:embed="rId4" cstate="print"/>
             <a:stretch>
               <a:fillRect/>
             </a:stretch>
@@ -10447,7 +10630,7 @@
             <p:nvPr/>
           </p:nvPicPr>
           <p:blipFill>
-            <a:blip r:embed="rId4" cstate="print"/>
+            <a:blip r:embed="rId5" cstate="print"/>
             <a:stretch>
               <a:fillRect/>
             </a:stretch>
@@ -10602,7 +10785,7 @@
           <p:nvPr/>
         </p:nvPicPr>
         <p:blipFill>
-          <a:blip r:embed="rId5" cstate="print"/>
+          <a:blip r:embed="rId6" cstate="print"/>
           <a:stretch>
             <a:fillRect/>
           </a:stretch>
@@ -10762,7 +10945,7 @@
           <p:nvPr/>
         </p:nvPicPr>
         <p:blipFill>
-          <a:blip r:embed="rId6" cstate="print"/>
+          <a:blip r:embed="rId7" cstate="print"/>
           <a:stretch>
             <a:fillRect/>
           </a:stretch>
@@ -10844,7 +11027,7 @@
             <p:nvPr/>
           </p:nvPicPr>
           <p:blipFill>
-            <a:blip r:embed="rId7" cstate="print"/>
+            <a:blip r:embed="rId8" cstate="print"/>
             <a:stretch>
               <a:fillRect/>
             </a:stretch>
@@ -10897,7 +11080,9 @@
           <p:txBody>
             <a:bodyPr wrap="square" lIns="0" tIns="0" rIns="0" bIns="0" rtlCol="0"/>
             <a:lstStyle/>
-            <a:p/>
+            <a:p>
+              <a:endParaRPr/>
+            </a:p>
           </p:txBody>
         </p:sp>
         <p:sp>
@@ -10942,7 +11127,9 @@
           <p:txBody>
             <a:bodyPr wrap="square" lIns="0" tIns="0" rIns="0" bIns="0" rtlCol="0"/>
             <a:lstStyle/>
-            <a:p/>
+            <a:p>
+              <a:endParaRPr/>
+            </a:p>
           </p:txBody>
         </p:sp>
       </p:grpSp>
@@ -10967,7 +11154,7 @@
             <p:nvPr/>
           </p:nvPicPr>
           <p:blipFill>
-            <a:blip r:embed="rId7" cstate="print"/>
+            <a:blip r:embed="rId8" cstate="print"/>
             <a:stretch>
               <a:fillRect/>
             </a:stretch>
@@ -11020,7 +11207,9 @@
           <p:txBody>
             <a:bodyPr wrap="square" lIns="0" tIns="0" rIns="0" bIns="0" rtlCol="0"/>
             <a:lstStyle/>
-            <a:p/>
+            <a:p>
+              <a:endParaRPr/>
+            </a:p>
           </p:txBody>
         </p:sp>
         <p:sp>
@@ -11065,7 +11254,9 @@
           <p:txBody>
             <a:bodyPr wrap="square" lIns="0" tIns="0" rIns="0" bIns="0" rtlCol="0"/>
             <a:lstStyle/>
-            <a:p/>
+            <a:p>
+              <a:endParaRPr/>
+            </a:p>
           </p:txBody>
         </p:sp>
         <p:sp>
@@ -11106,7 +11297,9 @@
           <p:txBody>
             <a:bodyPr wrap="square" lIns="0" tIns="0" rIns="0" bIns="0" rtlCol="0"/>
             <a:lstStyle/>
-            <a:p/>
+            <a:p>
+              <a:endParaRPr/>
+            </a:p>
           </p:txBody>
         </p:sp>
         <p:sp>
@@ -11151,7 +11344,9 @@
           <p:txBody>
             <a:bodyPr wrap="square" lIns="0" tIns="0" rIns="0" bIns="0" rtlCol="0"/>
             <a:lstStyle/>
-            <a:p/>
+            <a:p>
+              <a:endParaRPr/>
+            </a:p>
           </p:txBody>
         </p:sp>
       </p:grpSp>
@@ -11162,7 +11357,7 @@
           <p:nvPr/>
         </p:nvPicPr>
         <p:blipFill>
-          <a:blip r:embed="rId8" cstate="print"/>
+          <a:blip r:embed="rId9" cstate="print"/>
           <a:stretch>
             <a:fillRect/>
           </a:stretch>
@@ -11396,7 +11591,7 @@
           <p:nvPr/>
         </p:nvPicPr>
         <p:blipFill>
-          <a:blip r:embed="rId8" cstate="print"/>
+          <a:blip r:embed="rId9" cstate="print"/>
           <a:stretch>
             <a:fillRect/>
           </a:stretch>
@@ -11463,7 +11658,9 @@
           <p:txBody>
             <a:bodyPr wrap="square" lIns="0" tIns="0" rIns="0" bIns="0" rtlCol="0"/>
             <a:lstStyle/>
-            <a:p/>
+            <a:p>
+              <a:endParaRPr/>
+            </a:p>
           </p:txBody>
         </p:sp>
         <p:sp>
@@ -11508,7 +11705,9 @@
           <p:txBody>
             <a:bodyPr wrap="square" lIns="0" tIns="0" rIns="0" bIns="0" rtlCol="0"/>
             <a:lstStyle/>
-            <a:p/>
+            <a:p>
+              <a:endParaRPr/>
+            </a:p>
           </p:txBody>
         </p:sp>
         <p:pic>
@@ -11518,7 +11717,7 @@
             <p:nvPr/>
           </p:nvPicPr>
           <p:blipFill>
-            <a:blip r:embed="rId7" cstate="print"/>
+            <a:blip r:embed="rId8" cstate="print"/>
             <a:stretch>
               <a:fillRect/>
             </a:stretch>
@@ -11540,7 +11739,7 @@
             <p:nvPr/>
           </p:nvPicPr>
           <p:blipFill>
-            <a:blip r:embed="rId9" cstate="print"/>
+            <a:blip r:embed="rId10" cstate="print"/>
             <a:stretch>
               <a:fillRect/>
             </a:stretch>
@@ -11608,7 +11807,9 @@
           <p:txBody>
             <a:bodyPr wrap="square" lIns="0" tIns="0" rIns="0" bIns="0" rtlCol="0"/>
             <a:lstStyle/>
-            <a:p/>
+            <a:p>
+              <a:endParaRPr/>
+            </a:p>
           </p:txBody>
         </p:sp>
         <p:sp>
@@ -11653,7 +11854,9 @@
           <p:txBody>
             <a:bodyPr wrap="square" lIns="0" tIns="0" rIns="0" bIns="0" rtlCol="0"/>
             <a:lstStyle/>
-            <a:p/>
+            <a:p>
+              <a:endParaRPr/>
+            </a:p>
           </p:txBody>
         </p:sp>
       </p:grpSp>
@@ -11670,9 +11873,11 @@
         <p:spPr/>
         <p:txBody>
           <a:bodyPr/>
+          <a:lstStyle/>
           <a:p>
             <a:fld id="{B6F15528-21DE-4FAA-801E-634DDDAF4B2B}" type="slidenum">
               <a:rPr/>
+              <a:t>18</a:t>
             </a:fld>
             <a:endParaRPr/>
           </a:p>
@@ -11724,7 +11929,7 @@
             <p:nvPr/>
           </p:nvPicPr>
           <p:blipFill>
-            <a:blip r:embed="rId1" cstate="print"/>
+            <a:blip r:embed="rId2" cstate="print"/>
             <a:stretch>
               <a:fillRect/>
             </a:stretch>
@@ -11784,7 +11989,9 @@
           <p:txBody>
             <a:bodyPr wrap="square" lIns="0" tIns="0" rIns="0" bIns="0" rtlCol="0"/>
             <a:lstStyle/>
-            <a:p/>
+            <a:p>
+              <a:endParaRPr/>
+            </a:p>
           </p:txBody>
         </p:sp>
       </p:grpSp>
@@ -11865,7 +12072,6 @@
               <a:rPr spc="-55" dirty="0"/>
               <a:t>Kafka</a:t>
             </a:r>
-            <a:endParaRPr spc="-55" dirty="0"/>
           </a:p>
         </p:txBody>
       </p:sp>
@@ -11890,7 +12096,7 @@
             <p:nvPr/>
           </p:nvPicPr>
           <p:blipFill>
-            <a:blip r:embed="rId2" cstate="print"/>
+            <a:blip r:embed="rId3" cstate="print"/>
             <a:stretch>
               <a:fillRect/>
             </a:stretch>
@@ -11912,7 +12118,7 @@
             <p:nvPr/>
           </p:nvPicPr>
           <p:blipFill>
-            <a:blip r:embed="rId2" cstate="print"/>
+            <a:blip r:embed="rId3" cstate="print"/>
             <a:stretch>
               <a:fillRect/>
             </a:stretch>
@@ -11934,7 +12140,7 @@
             <p:nvPr/>
           </p:nvPicPr>
           <p:blipFill>
-            <a:blip r:embed="rId3" cstate="print"/>
+            <a:blip r:embed="rId4" cstate="print"/>
             <a:stretch>
               <a:fillRect/>
             </a:stretch>
@@ -11956,7 +12162,7 @@
             <p:nvPr/>
           </p:nvPicPr>
           <p:blipFill>
-            <a:blip r:embed="rId4" cstate="print"/>
+            <a:blip r:embed="rId5" cstate="print"/>
             <a:stretch>
               <a:fillRect/>
             </a:stretch>
@@ -11978,7 +12184,7 @@
             <p:nvPr/>
           </p:nvPicPr>
           <p:blipFill>
-            <a:blip r:embed="rId4" cstate="print"/>
+            <a:blip r:embed="rId5" cstate="print"/>
             <a:stretch>
               <a:fillRect/>
             </a:stretch>
@@ -12000,7 +12206,7 @@
             <p:nvPr/>
           </p:nvPicPr>
           <p:blipFill>
-            <a:blip r:embed="rId4" cstate="print"/>
+            <a:blip r:embed="rId5" cstate="print"/>
             <a:stretch>
               <a:fillRect/>
             </a:stretch>
@@ -12023,7 +12229,7 @@
           <p:nvPr/>
         </p:nvPicPr>
         <p:blipFill>
-          <a:blip r:embed="rId5" cstate="print"/>
+          <a:blip r:embed="rId6" cstate="print"/>
           <a:stretch>
             <a:fillRect/>
           </a:stretch>
@@ -12045,7 +12251,7 @@
           <p:nvPr/>
         </p:nvPicPr>
         <p:blipFill>
-          <a:blip r:embed="rId6" cstate="print"/>
+          <a:blip r:embed="rId7" cstate="print"/>
           <a:stretch>
             <a:fillRect/>
           </a:stretch>
@@ -12067,7 +12273,7 @@
           <p:nvPr/>
         </p:nvPicPr>
         <p:blipFill>
-          <a:blip r:embed="rId7" cstate="print"/>
+          <a:blip r:embed="rId8" cstate="print"/>
           <a:stretch>
             <a:fillRect/>
           </a:stretch>
@@ -12198,7 +12404,9 @@
         <p:txBody>
           <a:bodyPr wrap="square" lIns="0" tIns="0" rIns="0" bIns="0" rtlCol="0"/>
           <a:lstStyle/>
-          <a:p/>
+          <a:p>
+            <a:endParaRPr/>
+          </a:p>
         </p:txBody>
       </p:sp>
       <p:sp>
@@ -12239,7 +12447,9 @@
         <p:txBody>
           <a:bodyPr wrap="square" lIns="0" tIns="0" rIns="0" bIns="0" rtlCol="0"/>
           <a:lstStyle/>
-          <a:p/>
+          <a:p>
+            <a:endParaRPr/>
+          </a:p>
         </p:txBody>
       </p:sp>
       <p:pic>
@@ -12249,7 +12459,7 @@
           <p:nvPr/>
         </p:nvPicPr>
         <p:blipFill>
-          <a:blip r:embed="rId8" cstate="print"/>
+          <a:blip r:embed="rId9" cstate="print"/>
           <a:stretch>
             <a:fillRect/>
           </a:stretch>
@@ -12320,7 +12530,7 @@
           <p:nvPr/>
         </p:nvPicPr>
         <p:blipFill>
-          <a:blip r:embed="rId9" cstate="print"/>
+          <a:blip r:embed="rId10" cstate="print"/>
           <a:stretch>
             <a:fillRect/>
           </a:stretch>
@@ -12388,7 +12598,7 @@
           <p:nvPr/>
         </p:nvPicPr>
         <p:blipFill>
-          <a:blip r:embed="rId10" cstate="print"/>
+          <a:blip r:embed="rId11" cstate="print"/>
           <a:stretch>
             <a:fillRect/>
           </a:stretch>
@@ -12441,7 +12651,9 @@
         <p:txBody>
           <a:bodyPr wrap="square" lIns="0" tIns="0" rIns="0" bIns="0" rtlCol="0"/>
           <a:lstStyle/>
-          <a:p/>
+          <a:p>
+            <a:endParaRPr/>
+          </a:p>
         </p:txBody>
       </p:sp>
       <p:sp>
@@ -12457,9 +12669,11 @@
         <p:spPr/>
         <p:txBody>
           <a:bodyPr/>
+          <a:lstStyle/>
           <a:p>
             <a:fld id="{B6F15528-21DE-4FAA-801E-634DDDAF4B2B}" type="slidenum">
               <a:rPr/>
+              <a:t>19</a:t>
             </a:fld>
             <a:endParaRPr/>
           </a:p>
@@ -12962,7 +13176,9 @@
           <p:txBody>
             <a:bodyPr wrap="square" lIns="0" tIns="0" rIns="0" bIns="0" rtlCol="0"/>
             <a:lstStyle/>
-            <a:p/>
+            <a:p>
+              <a:endParaRPr/>
+            </a:p>
           </p:txBody>
         </p:sp>
         <p:pic>
@@ -12972,7 +13188,7 @@
             <p:nvPr/>
           </p:nvPicPr>
           <p:blipFill>
-            <a:blip r:embed="rId1" cstate="print"/>
+            <a:blip r:embed="rId2" cstate="print"/>
             <a:stretch>
               <a:fillRect/>
             </a:stretch>
@@ -13026,7 +13242,9 @@
         <p:txBody>
           <a:bodyPr wrap="square" lIns="0" tIns="0" rIns="0" bIns="0" rtlCol="0"/>
           <a:lstStyle/>
-          <a:p/>
+          <a:p>
+            <a:endParaRPr/>
+          </a:p>
         </p:txBody>
       </p:sp>
       <p:grpSp>
@@ -13081,7 +13299,9 @@
           <p:txBody>
             <a:bodyPr wrap="square" lIns="0" tIns="0" rIns="0" bIns="0" rtlCol="0"/>
             <a:lstStyle/>
-            <a:p/>
+            <a:p>
+              <a:endParaRPr/>
+            </a:p>
           </p:txBody>
         </p:sp>
         <p:pic>
@@ -13091,7 +13311,7 @@
             <p:nvPr/>
           </p:nvPicPr>
           <p:blipFill>
-            <a:blip r:embed="rId1" cstate="print"/>
+            <a:blip r:embed="rId2" cstate="print"/>
             <a:stretch>
               <a:fillRect/>
             </a:stretch>
@@ -13145,7 +13365,9 @@
         <p:txBody>
           <a:bodyPr wrap="square" lIns="0" tIns="0" rIns="0" bIns="0" rtlCol="0"/>
           <a:lstStyle/>
-          <a:p/>
+          <a:p>
+            <a:endParaRPr/>
+          </a:p>
         </p:txBody>
       </p:sp>
       <p:sp>
@@ -13186,7 +13408,9 @@
         <p:txBody>
           <a:bodyPr wrap="square" lIns="0" tIns="0" rIns="0" bIns="0" rtlCol="0"/>
           <a:lstStyle/>
-          <a:p/>
+          <a:p>
+            <a:endParaRPr/>
+          </a:p>
         </p:txBody>
       </p:sp>
       <p:sp>
@@ -13227,7 +13451,9 @@
         <p:txBody>
           <a:bodyPr wrap="square" lIns="0" tIns="0" rIns="0" bIns="0" rtlCol="0"/>
           <a:lstStyle/>
-          <a:p/>
+          <a:p>
+            <a:endParaRPr/>
+          </a:p>
         </p:txBody>
       </p:sp>
       <p:pic>
@@ -13237,7 +13463,7 @@
           <p:nvPr/>
         </p:nvPicPr>
         <p:blipFill>
-          <a:blip r:embed="rId2" cstate="print"/>
+          <a:blip r:embed="rId3" cstate="print"/>
           <a:stretch>
             <a:fillRect/>
           </a:stretch>
@@ -13259,7 +13485,7 @@
           <p:nvPr/>
         </p:nvPicPr>
         <p:blipFill>
-          <a:blip r:embed="rId2" cstate="print"/>
+          <a:blip r:embed="rId3" cstate="print"/>
           <a:stretch>
             <a:fillRect/>
           </a:stretch>
@@ -13281,7 +13507,7 @@
           <p:nvPr/>
         </p:nvPicPr>
         <p:blipFill>
-          <a:blip r:embed="rId2" cstate="print"/>
+          <a:blip r:embed="rId3" cstate="print"/>
           <a:stretch>
             <a:fillRect/>
           </a:stretch>
@@ -13303,7 +13529,7 @@
           <p:nvPr/>
         </p:nvPicPr>
         <p:blipFill>
-          <a:blip r:embed="rId2" cstate="print"/>
+          <a:blip r:embed="rId3" cstate="print"/>
           <a:stretch>
             <a:fillRect/>
           </a:stretch>
@@ -13325,7 +13551,7 @@
           <p:nvPr/>
         </p:nvPicPr>
         <p:blipFill>
-          <a:blip r:embed="rId2" cstate="print"/>
+          <a:blip r:embed="rId3" cstate="print"/>
           <a:stretch>
             <a:fillRect/>
           </a:stretch>
@@ -13347,7 +13573,7 @@
           <p:nvPr/>
         </p:nvPicPr>
         <p:blipFill>
-          <a:blip r:embed="rId2" cstate="print"/>
+          <a:blip r:embed="rId3" cstate="print"/>
           <a:stretch>
             <a:fillRect/>
           </a:stretch>
@@ -13383,7 +13609,7 @@
             <p:nvPr/>
           </p:nvPicPr>
           <p:blipFill>
-            <a:blip r:embed="rId3" cstate="print"/>
+            <a:blip r:embed="rId4" cstate="print"/>
             <a:stretch>
               <a:fillRect/>
             </a:stretch>
@@ -13405,7 +13631,7 @@
             <p:nvPr/>
           </p:nvPicPr>
           <p:blipFill>
-            <a:blip r:embed="rId3" cstate="print"/>
+            <a:blip r:embed="rId4" cstate="print"/>
             <a:stretch>
               <a:fillRect/>
             </a:stretch>
@@ -13428,7 +13654,7 @@
           <p:nvPr/>
         </p:nvPicPr>
         <p:blipFill>
-          <a:blip r:embed="rId4" cstate="print"/>
+          <a:blip r:embed="rId5" cstate="print"/>
           <a:stretch>
             <a:fillRect/>
           </a:stretch>
@@ -13450,7 +13676,7 @@
           <p:nvPr/>
         </p:nvPicPr>
         <p:blipFill>
-          <a:blip r:embed="rId4" cstate="print"/>
+          <a:blip r:embed="rId5" cstate="print"/>
           <a:stretch>
             <a:fillRect/>
           </a:stretch>
@@ -13478,9 +13704,11 @@
         <p:spPr/>
         <p:txBody>
           <a:bodyPr/>
+          <a:lstStyle/>
           <a:p>
             <a:fld id="{B6F15528-21DE-4FAA-801E-634DDDAF4B2B}" type="slidenum">
               <a:rPr/>
+              <a:t>2</a:t>
             </a:fld>
             <a:endParaRPr/>
           </a:p>
@@ -13548,7 +13776,9 @@
         <p:txBody>
           <a:bodyPr wrap="square" lIns="0" tIns="0" rIns="0" bIns="0" rtlCol="0"/>
           <a:lstStyle/>
-          <a:p/>
+          <a:p>
+            <a:endParaRPr/>
+          </a:p>
         </p:txBody>
       </p:sp>
       <p:sp>
@@ -13809,7 +14039,7 @@
           <p:nvPr/>
         </p:nvPicPr>
         <p:blipFill>
-          <a:blip r:embed="rId1" cstate="print"/>
+          <a:blip r:embed="rId2" cstate="print"/>
           <a:stretch>
             <a:fillRect/>
           </a:stretch>
@@ -13889,7 +14119,6 @@
               <a:rPr spc="-35" dirty="0"/>
               <a:t>Consensus</a:t>
             </a:r>
-            <a:endParaRPr spc="-35" dirty="0"/>
           </a:p>
         </p:txBody>
       </p:sp>
@@ -13906,9 +14135,11 @@
         <p:spPr/>
         <p:txBody>
           <a:bodyPr/>
+          <a:lstStyle/>
           <a:p>
             <a:fld id="{B6F15528-21DE-4FAA-801E-634DDDAF4B2B}" type="slidenum">
               <a:rPr/>
+              <a:t>20</a:t>
             </a:fld>
             <a:endParaRPr/>
           </a:p>
@@ -13976,7 +14207,9 @@
         <p:txBody>
           <a:bodyPr wrap="square" lIns="0" tIns="0" rIns="0" bIns="0" rtlCol="0"/>
           <a:lstStyle/>
-          <a:p/>
+          <a:p>
+            <a:endParaRPr/>
+          </a:p>
         </p:txBody>
       </p:sp>
       <p:sp>
@@ -14178,7 +14411,7 @@
               </a:rPr>
               <a:t>nodes</a:t>
             </a:r>
-            <a:endParaRPr sz="2400">
+            <a:endParaRPr sz="2400" dirty="0">
               <a:latin typeface="Verdana" panose="020B0604030504040204"/>
               <a:cs typeface="Verdana" panose="020B0604030504040204"/>
             </a:endParaRPr>
@@ -14229,7 +14462,7 @@
               </a:rPr>
               <a:t>information</a:t>
             </a:r>
-            <a:endParaRPr sz="2400">
+            <a:endParaRPr sz="2400" dirty="0">
               <a:latin typeface="Verdana" panose="020B0604030504040204"/>
               <a:cs typeface="Verdana" panose="020B0604030504040204"/>
             </a:endParaRPr>
@@ -14258,7 +14491,27 @@
                 <a:latin typeface="Verdana" panose="020B0604030504040204"/>
                 <a:cs typeface="Verdana" panose="020B0604030504040204"/>
               </a:rPr>
-              <a:t>Heath</a:t>
+              <a:t>Hea</a:t>
+            </a:r>
+            <a:r>
+              <a:rPr lang="en-IN" sz="2400" spc="-15" dirty="0">
+                <a:solidFill>
+                  <a:srgbClr val="F05A28"/>
+                </a:solidFill>
+                <a:latin typeface="Verdana" panose="020B0604030504040204"/>
+                <a:cs typeface="Verdana" panose="020B0604030504040204"/>
+              </a:rPr>
+              <a:t>l</a:t>
+            </a:r>
+            <a:r>
+              <a:rPr sz="2400" spc="-15" dirty="0" err="1">
+                <a:solidFill>
+                  <a:srgbClr val="F05A28"/>
+                </a:solidFill>
+                <a:latin typeface="Verdana" panose="020B0604030504040204"/>
+                <a:cs typeface="Verdana" panose="020B0604030504040204"/>
+              </a:rPr>
+              <a:t>th</a:t>
             </a:r>
             <a:r>
               <a:rPr sz="2400" spc="-165" dirty="0">
@@ -14280,7 +14533,7 @@
               </a:rPr>
               <a:t>status</a:t>
             </a:r>
-            <a:endParaRPr sz="2400">
+            <a:endParaRPr sz="2400" dirty="0">
               <a:latin typeface="Verdana" panose="020B0604030504040204"/>
               <a:cs typeface="Verdana" panose="020B0604030504040204"/>
             </a:endParaRPr>
@@ -14331,7 +14584,7 @@
               </a:rPr>
               <a:t>membership</a:t>
             </a:r>
-            <a:endParaRPr sz="2400">
+            <a:endParaRPr sz="2400" dirty="0">
               <a:latin typeface="Verdana" panose="020B0604030504040204"/>
               <a:cs typeface="Verdana" panose="020B0604030504040204"/>
             </a:endParaRPr>
@@ -14623,39 +14876,29 @@
                 <a:latin typeface="Verdana" panose="020B0604030504040204"/>
                 <a:cs typeface="Verdana" panose="020B0604030504040204"/>
               </a:rPr>
-              <a:t>a</a:t>
-            </a:r>
-            <a:r>
-              <a:rPr sz="2400" spc="-35" dirty="0">
+              <a:t>an</a:t>
+            </a:r>
+            <a:r>
+              <a:rPr sz="2400" spc="80" dirty="0">
                 <a:solidFill>
                   <a:srgbClr val="F05A28"/>
                 </a:solidFill>
                 <a:latin typeface="Verdana" panose="020B0604030504040204"/>
                 <a:cs typeface="Verdana" panose="020B0604030504040204"/>
               </a:rPr>
-              <a:t>n</a:t>
-            </a:r>
-            <a:r>
-              <a:rPr sz="2400" spc="80" dirty="0">
+              <a:t>d  </a:t>
+            </a:r>
+            <a:r>
+              <a:rPr sz="2400" spc="40" dirty="0">
                 <a:solidFill>
                   <a:srgbClr val="F05A28"/>
                 </a:solidFill>
                 <a:latin typeface="Verdana" panose="020B0604030504040204"/>
                 <a:cs typeface="Verdana" panose="020B0604030504040204"/>
               </a:rPr>
-              <a:t>d  </a:t>
-            </a:r>
-            <a:r>
-              <a:rPr sz="2400" spc="40" dirty="0">
-                <a:solidFill>
-                  <a:srgbClr val="F05A28"/>
-                </a:solidFill>
-                <a:latin typeface="Verdana" panose="020B0604030504040204"/>
-                <a:cs typeface="Verdana" panose="020B0604030504040204"/>
-              </a:rPr>
               <a:t>Neo4j</a:t>
             </a:r>
-            <a:endParaRPr sz="2400">
+            <a:endParaRPr sz="2400" dirty="0">
               <a:latin typeface="Verdana" panose="020B0604030504040204"/>
               <a:cs typeface="Verdana" panose="020B0604030504040204"/>
             </a:endParaRPr>
@@ -14839,7 +15082,7 @@
               </a:rPr>
               <a:t>“ensemble”</a:t>
             </a:r>
-            <a:endParaRPr sz="2400">
+            <a:endParaRPr sz="2400" dirty="0">
               <a:latin typeface="Verdana" panose="020B0604030504040204"/>
               <a:cs typeface="Verdana" panose="020B0604030504040204"/>
             </a:endParaRPr>
@@ -14891,7 +15134,6 @@
               <a:rPr spc="-20" dirty="0"/>
               <a:t>Zookeeper</a:t>
             </a:r>
-            <a:endParaRPr spc="-20" dirty="0"/>
           </a:p>
         </p:txBody>
       </p:sp>
@@ -14902,7 +15144,7 @@
           <p:nvPr/>
         </p:nvPicPr>
         <p:blipFill>
-          <a:blip r:embed="rId1" cstate="print"/>
+          <a:blip r:embed="rId2" cstate="print"/>
           <a:stretch>
             <a:fillRect/>
           </a:stretch>
@@ -14930,9 +15172,11 @@
         <p:spPr/>
         <p:txBody>
           <a:bodyPr/>
+          <a:lstStyle/>
           <a:p>
             <a:fld id="{B6F15528-21DE-4FAA-801E-634DDDAF4B2B}" type="slidenum">
               <a:rPr/>
+              <a:t>21</a:t>
             </a:fld>
             <a:endParaRPr/>
           </a:p>
@@ -15024,7 +15268,9 @@
           <p:txBody>
             <a:bodyPr wrap="square" lIns="0" tIns="0" rIns="0" bIns="0" rtlCol="0"/>
             <a:lstStyle/>
-            <a:p/>
+            <a:p>
+              <a:endParaRPr/>
+            </a:p>
           </p:txBody>
         </p:sp>
         <p:sp>
@@ -15072,7 +15318,9 @@
           <p:txBody>
             <a:bodyPr wrap="square" lIns="0" tIns="0" rIns="0" bIns="0" rtlCol="0"/>
             <a:lstStyle/>
-            <a:p/>
+            <a:p>
+              <a:endParaRPr/>
+            </a:p>
           </p:txBody>
         </p:sp>
         <p:sp>
@@ -15122,7 +15370,9 @@
           <p:txBody>
             <a:bodyPr wrap="square" lIns="0" tIns="0" rIns="0" bIns="0" rtlCol="0"/>
             <a:lstStyle/>
-            <a:p/>
+            <a:p>
+              <a:endParaRPr/>
+            </a:p>
           </p:txBody>
         </p:sp>
       </p:grpSp>
@@ -15187,7 +15437,9 @@
           <p:txBody>
             <a:bodyPr wrap="square" lIns="0" tIns="0" rIns="0" bIns="0" rtlCol="0"/>
             <a:lstStyle/>
-            <a:p/>
+            <a:p>
+              <a:endParaRPr/>
+            </a:p>
           </p:txBody>
         </p:sp>
         <p:sp>
@@ -15235,7 +15487,9 @@
           <p:txBody>
             <a:bodyPr wrap="square" lIns="0" tIns="0" rIns="0" bIns="0" rtlCol="0"/>
             <a:lstStyle/>
-            <a:p/>
+            <a:p>
+              <a:endParaRPr/>
+            </a:p>
           </p:txBody>
         </p:sp>
         <p:sp>
@@ -15285,7 +15539,9 @@
           <p:txBody>
             <a:bodyPr wrap="square" lIns="0" tIns="0" rIns="0" bIns="0" rtlCol="0"/>
             <a:lstStyle/>
-            <a:p/>
+            <a:p>
+              <a:endParaRPr/>
+            </a:p>
           </p:txBody>
         </p:sp>
         <p:sp>
@@ -15333,7 +15589,9 @@
           <p:txBody>
             <a:bodyPr wrap="square" lIns="0" tIns="0" rIns="0" bIns="0" rtlCol="0"/>
             <a:lstStyle/>
-            <a:p/>
+            <a:p>
+              <a:endParaRPr/>
+            </a:p>
           </p:txBody>
         </p:sp>
         <p:sp>
@@ -15383,7 +15641,9 @@
           <p:txBody>
             <a:bodyPr wrap="square" lIns="0" tIns="0" rIns="0" bIns="0" rtlCol="0"/>
             <a:lstStyle/>
-            <a:p/>
+            <a:p>
+              <a:endParaRPr/>
+            </a:p>
           </p:txBody>
         </p:sp>
       </p:grpSp>
@@ -15448,7 +15708,6 @@
               <a:rPr dirty="0"/>
               <a:t>Architecture</a:t>
             </a:r>
-            <a:endParaRPr dirty="0"/>
           </a:p>
         </p:txBody>
       </p:sp>
@@ -15473,7 +15732,7 @@
             <p:nvPr/>
           </p:nvPicPr>
           <p:blipFill>
-            <a:blip r:embed="rId1" cstate="print"/>
+            <a:blip r:embed="rId2" cstate="print"/>
             <a:stretch>
               <a:fillRect/>
             </a:stretch>
@@ -15533,7 +15792,9 @@
           <p:txBody>
             <a:bodyPr wrap="square" lIns="0" tIns="0" rIns="0" bIns="0" rtlCol="0"/>
             <a:lstStyle/>
-            <a:p/>
+            <a:p>
+              <a:endParaRPr/>
+            </a:p>
           </p:txBody>
         </p:sp>
       </p:grpSp>
@@ -15665,7 +15926,9 @@
           <p:txBody>
             <a:bodyPr wrap="square" lIns="0" tIns="0" rIns="0" bIns="0" rtlCol="0"/>
             <a:lstStyle/>
-            <a:p/>
+            <a:p>
+              <a:endParaRPr/>
+            </a:p>
           </p:txBody>
         </p:sp>
         <p:sp>
@@ -15715,7 +15978,9 @@
           <p:txBody>
             <a:bodyPr wrap="square" lIns="0" tIns="0" rIns="0" bIns="0" rtlCol="0"/>
             <a:lstStyle/>
-            <a:p/>
+            <a:p>
+              <a:endParaRPr/>
+            </a:p>
           </p:txBody>
         </p:sp>
         <p:pic>
@@ -15725,7 +15990,7 @@
             <p:nvPr/>
           </p:nvPicPr>
           <p:blipFill>
-            <a:blip r:embed="rId2" cstate="print"/>
+            <a:blip r:embed="rId3" cstate="print"/>
             <a:stretch>
               <a:fillRect/>
             </a:stretch>
@@ -15747,7 +16012,7 @@
             <p:nvPr/>
           </p:nvPicPr>
           <p:blipFill>
-            <a:blip r:embed="rId2" cstate="print"/>
+            <a:blip r:embed="rId3" cstate="print"/>
             <a:stretch>
               <a:fillRect/>
             </a:stretch>
@@ -15769,7 +16034,7 @@
             <p:nvPr/>
           </p:nvPicPr>
           <p:blipFill>
-            <a:blip r:embed="rId3" cstate="print"/>
+            <a:blip r:embed="rId4" cstate="print"/>
             <a:stretch>
               <a:fillRect/>
             </a:stretch>
@@ -15791,7 +16056,7 @@
             <p:nvPr/>
           </p:nvPicPr>
           <p:blipFill>
-            <a:blip r:embed="rId4" cstate="print"/>
+            <a:blip r:embed="rId5" cstate="print"/>
             <a:stretch>
               <a:fillRect/>
             </a:stretch>
@@ -15813,7 +16078,7 @@
             <p:nvPr/>
           </p:nvPicPr>
           <p:blipFill>
-            <a:blip r:embed="rId4" cstate="print"/>
+            <a:blip r:embed="rId5" cstate="print"/>
             <a:stretch>
               <a:fillRect/>
             </a:stretch>
@@ -15835,7 +16100,7 @@
             <p:nvPr/>
           </p:nvPicPr>
           <p:blipFill>
-            <a:blip r:embed="rId4" cstate="print"/>
+            <a:blip r:embed="rId5" cstate="print"/>
             <a:stretch>
               <a:fillRect/>
             </a:stretch>
@@ -15889,7 +16154,9 @@
         <p:txBody>
           <a:bodyPr wrap="square" lIns="0" tIns="0" rIns="0" bIns="0" rtlCol="0"/>
           <a:lstStyle/>
-          <a:p/>
+          <a:p>
+            <a:endParaRPr/>
+          </a:p>
         </p:txBody>
       </p:sp>
       <p:pic>
@@ -15899,7 +16166,7 @@
           <p:nvPr/>
         </p:nvPicPr>
         <p:blipFill>
-          <a:blip r:embed="rId5" cstate="print"/>
+          <a:blip r:embed="rId6" cstate="print"/>
           <a:stretch>
             <a:fillRect/>
           </a:stretch>
@@ -15970,7 +16237,7 @@
           <p:nvPr/>
         </p:nvPicPr>
         <p:blipFill>
-          <a:blip r:embed="rId6" cstate="print"/>
+          <a:blip r:embed="rId7" cstate="print"/>
           <a:stretch>
             <a:fillRect/>
           </a:stretch>
@@ -16038,7 +16305,7 @@
           <p:nvPr/>
         </p:nvPicPr>
         <p:blipFill>
-          <a:blip r:embed="rId7" cstate="print"/>
+          <a:blip r:embed="rId8" cstate="print"/>
           <a:stretch>
             <a:fillRect/>
           </a:stretch>
@@ -16091,7 +16358,9 @@
         <p:txBody>
           <a:bodyPr wrap="square" lIns="0" tIns="0" rIns="0" bIns="0" rtlCol="0"/>
           <a:lstStyle/>
-          <a:p/>
+          <a:p>
+            <a:endParaRPr/>
+          </a:p>
         </p:txBody>
       </p:sp>
       <p:sp>
@@ -16132,7 +16401,9 @@
         <p:txBody>
           <a:bodyPr wrap="square" lIns="0" tIns="0" rIns="0" bIns="0" rtlCol="0"/>
           <a:lstStyle/>
-          <a:p/>
+          <a:p>
+            <a:endParaRPr/>
+          </a:p>
         </p:txBody>
       </p:sp>
       <p:sp>
@@ -16230,7 +16501,7 @@
             <p:nvPr/>
           </p:nvPicPr>
           <p:blipFill>
-            <a:blip r:embed="rId8" cstate="print"/>
+            <a:blip r:embed="rId9" cstate="print"/>
             <a:stretch>
               <a:fillRect/>
             </a:stretch>
@@ -16252,7 +16523,7 @@
             <p:nvPr/>
           </p:nvPicPr>
           <p:blipFill>
-            <a:blip r:embed="rId9" cstate="print"/>
+            <a:blip r:embed="rId10" cstate="print"/>
             <a:stretch>
               <a:fillRect/>
             </a:stretch>
@@ -16274,7 +16545,7 @@
             <p:nvPr/>
           </p:nvPicPr>
           <p:blipFill>
-            <a:blip r:embed="rId10" cstate="print"/>
+            <a:blip r:embed="rId11" cstate="print"/>
             <a:stretch>
               <a:fillRect/>
             </a:stretch>
@@ -16303,9 +16574,11 @@
         <p:spPr/>
         <p:txBody>
           <a:bodyPr/>
+          <a:lstStyle/>
           <a:p>
             <a:fld id="{B6F15528-21DE-4FAA-801E-634DDDAF4B2B}" type="slidenum">
               <a:rPr/>
+              <a:t>22</a:t>
             </a:fld>
             <a:endParaRPr/>
           </a:p>
@@ -16343,7 +16616,7 @@
           <p:nvPr/>
         </p:nvPicPr>
         <p:blipFill>
-          <a:blip r:embed="rId1" cstate="print"/>
+          <a:blip r:embed="rId2" cstate="print"/>
           <a:stretch>
             <a:fillRect/>
           </a:stretch>
@@ -16776,7 +17049,6 @@
               <a:rPr spc="-25" dirty="0"/>
               <a:t>systems</a:t>
             </a:r>
-            <a:endParaRPr spc="-25" dirty="0"/>
           </a:p>
           <a:p>
             <a:pPr marL="4631690" marR="591185" indent="-288925">
@@ -16848,11 +17120,7 @@
             </a:r>
             <a:r>
               <a:rPr spc="-35" dirty="0"/>
-              <a:t>l</a:t>
-            </a:r>
-            <a:r>
-              <a:rPr spc="-35" dirty="0"/>
-              <a:t>es</a:t>
+              <a:t>les</a:t>
             </a:r>
             <a:r>
               <a:rPr spc="-484" dirty="0"/>
@@ -16926,7 +17194,6 @@
               <a:rPr spc="10" dirty="0"/>
               <a:t>Followers</a:t>
             </a:r>
-            <a:endParaRPr spc="10" dirty="0"/>
           </a:p>
           <a:p>
             <a:pPr marL="4631690" indent="-289560">
@@ -16964,7 +17231,6 @@
               <a:rPr dirty="0"/>
               <a:t>replication</a:t>
             </a:r>
-            <a:endParaRPr dirty="0"/>
           </a:p>
           <a:p>
             <a:pPr marL="4631690" indent="-289560">
@@ -16994,7 +17260,6 @@
               <a:rPr dirty="0"/>
               <a:t>communication</a:t>
             </a:r>
-            <a:endParaRPr dirty="0"/>
           </a:p>
           <a:p>
             <a:pPr marL="4103370">
@@ -17033,7 +17298,6 @@
               <a:rPr spc="40" dirty="0"/>
               <a:t>Zookeeper</a:t>
             </a:r>
-            <a:endParaRPr spc="40" dirty="0"/>
           </a:p>
         </p:txBody>
       </p:sp>
@@ -17116,9 +17380,11 @@
         <p:spPr/>
         <p:txBody>
           <a:bodyPr/>
+          <a:lstStyle/>
           <a:p>
             <a:fld id="{B6F15528-21DE-4FAA-801E-634DDDAF4B2B}" type="slidenum">
               <a:rPr/>
+              <a:t>23</a:t>
             </a:fld>
             <a:endParaRPr/>
           </a:p>
@@ -17226,7 +17492,6 @@
               <a:rPr spc="-105" dirty="0"/>
               <a:t>System</a:t>
             </a:r>
-            <a:endParaRPr spc="-105" dirty="0"/>
           </a:p>
         </p:txBody>
       </p:sp>
@@ -17282,7 +17547,9 @@
           <p:txBody>
             <a:bodyPr wrap="square" lIns="0" tIns="0" rIns="0" bIns="0" rtlCol="0"/>
             <a:lstStyle/>
-            <a:p/>
+            <a:p>
+              <a:endParaRPr/>
+            </a:p>
           </p:txBody>
         </p:sp>
         <p:pic>
@@ -17292,7 +17559,7 @@
             <p:nvPr/>
           </p:nvPicPr>
           <p:blipFill>
-            <a:blip r:embed="rId1" cstate="print"/>
+            <a:blip r:embed="rId2" cstate="print"/>
             <a:stretch>
               <a:fillRect/>
             </a:stretch>
@@ -17346,7 +17613,9 @@
         <p:txBody>
           <a:bodyPr wrap="square" lIns="0" tIns="0" rIns="0" bIns="0" rtlCol="0"/>
           <a:lstStyle/>
-          <a:p/>
+          <a:p>
+            <a:endParaRPr/>
+          </a:p>
         </p:txBody>
       </p:sp>
       <p:grpSp>
@@ -17401,7 +17670,9 @@
           <p:txBody>
             <a:bodyPr wrap="square" lIns="0" tIns="0" rIns="0" bIns="0" rtlCol="0"/>
             <a:lstStyle/>
-            <a:p/>
+            <a:p>
+              <a:endParaRPr/>
+            </a:p>
           </p:txBody>
         </p:sp>
         <p:pic>
@@ -17411,7 +17682,7 @@
             <p:nvPr/>
           </p:nvPicPr>
           <p:blipFill>
-            <a:blip r:embed="rId1" cstate="print"/>
+            <a:blip r:embed="rId2" cstate="print"/>
             <a:stretch>
               <a:fillRect/>
             </a:stretch>
@@ -17465,7 +17736,9 @@
         <p:txBody>
           <a:bodyPr wrap="square" lIns="0" tIns="0" rIns="0" bIns="0" rtlCol="0"/>
           <a:lstStyle/>
-          <a:p/>
+          <a:p>
+            <a:endParaRPr/>
+          </a:p>
         </p:txBody>
       </p:sp>
       <p:sp>
@@ -17506,7 +17779,9 @@
         <p:txBody>
           <a:bodyPr wrap="square" lIns="0" tIns="0" rIns="0" bIns="0" rtlCol="0"/>
           <a:lstStyle/>
-          <a:p/>
+          <a:p>
+            <a:endParaRPr/>
+          </a:p>
         </p:txBody>
       </p:sp>
       <p:sp>
@@ -17547,7 +17822,9 @@
         <p:txBody>
           <a:bodyPr wrap="square" lIns="0" tIns="0" rIns="0" bIns="0" rtlCol="0"/>
           <a:lstStyle/>
-          <a:p/>
+          <a:p>
+            <a:endParaRPr/>
+          </a:p>
         </p:txBody>
       </p:sp>
       <p:pic>
@@ -17557,7 +17834,7 @@
           <p:nvPr/>
         </p:nvPicPr>
         <p:blipFill>
-          <a:blip r:embed="rId2" cstate="print"/>
+          <a:blip r:embed="rId3" cstate="print"/>
           <a:stretch>
             <a:fillRect/>
           </a:stretch>
@@ -17579,7 +17856,7 @@
           <p:nvPr/>
         </p:nvPicPr>
         <p:blipFill>
-          <a:blip r:embed="rId2" cstate="print"/>
+          <a:blip r:embed="rId3" cstate="print"/>
           <a:stretch>
             <a:fillRect/>
           </a:stretch>
@@ -17601,7 +17878,7 @@
           <p:nvPr/>
         </p:nvPicPr>
         <p:blipFill>
-          <a:blip r:embed="rId2" cstate="print"/>
+          <a:blip r:embed="rId3" cstate="print"/>
           <a:stretch>
             <a:fillRect/>
           </a:stretch>
@@ -17623,7 +17900,7 @@
           <p:nvPr/>
         </p:nvPicPr>
         <p:blipFill>
-          <a:blip r:embed="rId2" cstate="print"/>
+          <a:blip r:embed="rId3" cstate="print"/>
           <a:stretch>
             <a:fillRect/>
           </a:stretch>
@@ -18072,7 +18349,87 @@
                 <a:latin typeface="Verdana" panose="020B0604030504040204"/>
                 <a:cs typeface="Verdana" panose="020B0604030504040204"/>
               </a:rPr>
-              <a:t>“</a:t>
+              <a:t>“X”</a:t>
+            </a:r>
+            <a:r>
+              <a:rPr sz="2000" dirty="0">
+                <a:solidFill>
+                  <a:srgbClr val="675BA7"/>
+                </a:solidFill>
+                <a:latin typeface="Verdana" panose="020B0604030504040204"/>
+                <a:cs typeface="Verdana" panose="020B0604030504040204"/>
+              </a:rPr>
+              <a:t>	</a:t>
+            </a:r>
+            <a:r>
+              <a:rPr sz="2000" spc="30" dirty="0">
+                <a:solidFill>
+                  <a:srgbClr val="675BA7"/>
+                </a:solidFill>
+                <a:latin typeface="Verdana" panose="020B0604030504040204"/>
+                <a:cs typeface="Verdana" panose="020B0604030504040204"/>
+              </a:rPr>
+              <a:t>R</a:t>
+            </a:r>
+            <a:r>
+              <a:rPr sz="2000" spc="5" dirty="0">
+                <a:solidFill>
+                  <a:srgbClr val="675BA7"/>
+                </a:solidFill>
+                <a:latin typeface="Verdana" panose="020B0604030504040204"/>
+                <a:cs typeface="Verdana" panose="020B0604030504040204"/>
+              </a:rPr>
+              <a:t>etr</a:t>
+            </a:r>
+            <a:r>
+              <a:rPr sz="2000" spc="15" dirty="0">
+                <a:solidFill>
+                  <a:srgbClr val="675BA7"/>
+                </a:solidFill>
+                <a:latin typeface="Verdana" panose="020B0604030504040204"/>
+                <a:cs typeface="Verdana" panose="020B0604030504040204"/>
+              </a:rPr>
+              <a:t>i</a:t>
+            </a:r>
+            <a:r>
+              <a:rPr sz="2000" spc="-35" dirty="0">
+                <a:solidFill>
+                  <a:srgbClr val="675BA7"/>
+                </a:solidFill>
+                <a:latin typeface="Verdana" panose="020B0604030504040204"/>
+                <a:cs typeface="Verdana" panose="020B0604030504040204"/>
+              </a:rPr>
+              <a:t>e</a:t>
+            </a:r>
+            <a:r>
+              <a:rPr sz="2000" spc="-60" dirty="0">
+                <a:solidFill>
+                  <a:srgbClr val="675BA7"/>
+                </a:solidFill>
+                <a:latin typeface="Verdana" panose="020B0604030504040204"/>
+                <a:cs typeface="Verdana" panose="020B0604030504040204"/>
+              </a:rPr>
+              <a:t>v</a:t>
+            </a:r>
+            <a:r>
+              <a:rPr sz="2000" spc="-170" dirty="0">
+                <a:solidFill>
+                  <a:srgbClr val="675BA7"/>
+                </a:solidFill>
+                <a:latin typeface="Verdana" panose="020B0604030504040204"/>
+                <a:cs typeface="Verdana" panose="020B0604030504040204"/>
+              </a:rPr>
+              <a:t>e:</a:t>
+            </a:r>
+            <a:r>
+              <a:rPr sz="2000" spc="-75" dirty="0">
+                <a:solidFill>
+                  <a:srgbClr val="675BA7"/>
+                </a:solidFill>
+                <a:latin typeface="Verdana" panose="020B0604030504040204"/>
+                <a:cs typeface="Verdana" panose="020B0604030504040204"/>
+              </a:rPr>
+              <a:t> </a:t>
             </a:r>
             <a:r>
               <a:rPr sz="2000" spc="80" dirty="0">
@@ -18082,107 +18439,7 @@
                 <a:latin typeface="Verdana" panose="020B0604030504040204"/>
                 <a:cs typeface="Verdana" panose="020B0604030504040204"/>
               </a:rPr>
-              <a:t>X”</a:t>
-            </a:r>
-            <a:r>
-              <a:rPr sz="2000" dirty="0">
-                <a:solidFill>
-                  <a:srgbClr val="675BA7"/>
-                </a:solidFill>
-                <a:latin typeface="Verdana" panose="020B0604030504040204"/>
-                <a:cs typeface="Verdana" panose="020B0604030504040204"/>
-              </a:rPr>
-              <a:t>	</a:t>
-            </a:r>
-            <a:r>
-              <a:rPr sz="2000" spc="30" dirty="0">
-                <a:solidFill>
-                  <a:srgbClr val="675BA7"/>
-                </a:solidFill>
-                <a:latin typeface="Verdana" panose="020B0604030504040204"/>
-                <a:cs typeface="Verdana" panose="020B0604030504040204"/>
-              </a:rPr>
-              <a:t>R</a:t>
-            </a:r>
-            <a:r>
-              <a:rPr sz="2000" spc="5" dirty="0">
-                <a:solidFill>
-                  <a:srgbClr val="675BA7"/>
-                </a:solidFill>
-                <a:latin typeface="Verdana" panose="020B0604030504040204"/>
-                <a:cs typeface="Verdana" panose="020B0604030504040204"/>
-              </a:rPr>
-              <a:t>etr</a:t>
-            </a:r>
-            <a:r>
-              <a:rPr sz="2000" spc="15" dirty="0">
-                <a:solidFill>
-                  <a:srgbClr val="675BA7"/>
-                </a:solidFill>
-                <a:latin typeface="Verdana" panose="020B0604030504040204"/>
-                <a:cs typeface="Verdana" panose="020B0604030504040204"/>
-              </a:rPr>
-              <a:t>i</a:t>
-            </a:r>
-            <a:r>
-              <a:rPr sz="2000" spc="-35" dirty="0">
-                <a:solidFill>
-                  <a:srgbClr val="675BA7"/>
-                </a:solidFill>
-                <a:latin typeface="Verdana" panose="020B0604030504040204"/>
-                <a:cs typeface="Verdana" panose="020B0604030504040204"/>
-              </a:rPr>
-              <a:t>e</a:t>
-            </a:r>
-            <a:r>
-              <a:rPr sz="2000" spc="-60" dirty="0">
-                <a:solidFill>
-                  <a:srgbClr val="675BA7"/>
-                </a:solidFill>
-                <a:latin typeface="Verdana" panose="020B0604030504040204"/>
-                <a:cs typeface="Verdana" panose="020B0604030504040204"/>
-              </a:rPr>
-              <a:t>v</a:t>
-            </a:r>
-            <a:r>
-              <a:rPr sz="2000" spc="-170" dirty="0">
-                <a:solidFill>
-                  <a:srgbClr val="675BA7"/>
-                </a:solidFill>
-                <a:latin typeface="Verdana" panose="020B0604030504040204"/>
-                <a:cs typeface="Verdana" panose="020B0604030504040204"/>
-              </a:rPr>
-              <a:t>e:</a:t>
-            </a:r>
-            <a:r>
-              <a:rPr sz="2000" spc="-75" dirty="0">
-                <a:solidFill>
-                  <a:srgbClr val="675BA7"/>
-                </a:solidFill>
-                <a:latin typeface="Verdana" panose="020B0604030504040204"/>
-                <a:cs typeface="Verdana" panose="020B0604030504040204"/>
-              </a:rPr>
-              <a:t> </a:t>
-            </a:r>
-            <a:r>
-              <a:rPr sz="2000" spc="80" dirty="0">
-                <a:solidFill>
-                  <a:srgbClr val="675BA7"/>
-                </a:solidFill>
-                <a:latin typeface="Verdana" panose="020B0604030504040204"/>
-                <a:cs typeface="Verdana" panose="020B0604030504040204"/>
-              </a:rPr>
-              <a:t>“X</a:t>
-            </a:r>
-            <a:r>
-              <a:rPr sz="2000" spc="80" dirty="0">
-                <a:solidFill>
-                  <a:srgbClr val="675BA7"/>
-                </a:solidFill>
-                <a:latin typeface="Verdana" panose="020B0604030504040204"/>
-                <a:cs typeface="Verdana" panose="020B0604030504040204"/>
-              </a:rPr>
-              <a:t>”</a:t>
+              <a:t>“X”</a:t>
             </a:r>
             <a:endParaRPr sz="2000">
               <a:latin typeface="Verdana" panose="020B0604030504040204"/>
@@ -18198,7 +18455,7 @@
           <p:nvPr/>
         </p:nvPicPr>
         <p:blipFill>
-          <a:blip r:embed="rId2" cstate="print"/>
+          <a:blip r:embed="rId3" cstate="print"/>
           <a:stretch>
             <a:fillRect/>
           </a:stretch>
@@ -18220,7 +18477,7 @@
           <p:nvPr/>
         </p:nvPicPr>
         <p:blipFill>
-          <a:blip r:embed="rId2" cstate="print"/>
+          <a:blip r:embed="rId3" cstate="print"/>
           <a:stretch>
             <a:fillRect/>
           </a:stretch>
@@ -18256,7 +18513,7 @@
             <p:nvPr/>
           </p:nvPicPr>
           <p:blipFill>
-            <a:blip r:embed="rId3" cstate="print"/>
+            <a:blip r:embed="rId4" cstate="print"/>
             <a:stretch>
               <a:fillRect/>
             </a:stretch>
@@ -18278,7 +18535,7 @@
             <p:nvPr/>
           </p:nvPicPr>
           <p:blipFill>
-            <a:blip r:embed="rId3" cstate="print"/>
+            <a:blip r:embed="rId4" cstate="print"/>
             <a:stretch>
               <a:fillRect/>
             </a:stretch>
@@ -18301,7 +18558,7 @@
           <p:nvPr/>
         </p:nvPicPr>
         <p:blipFill>
-          <a:blip r:embed="rId4" cstate="print"/>
+          <a:blip r:embed="rId5" cstate="print"/>
           <a:stretch>
             <a:fillRect/>
           </a:stretch>
@@ -18323,7 +18580,7 @@
           <p:nvPr/>
         </p:nvPicPr>
         <p:blipFill>
-          <a:blip r:embed="rId4" cstate="print"/>
+          <a:blip r:embed="rId5" cstate="print"/>
           <a:stretch>
             <a:fillRect/>
           </a:stretch>
@@ -18375,17 +18632,7 @@
                 <a:latin typeface="Verdana" panose="020B0604030504040204"/>
                 <a:cs typeface="Verdana" panose="020B0604030504040204"/>
               </a:rPr>
-              <a:t>“</a:t>
-            </a:r>
-            <a:r>
-              <a:rPr sz="2000" spc="80" dirty="0">
-                <a:solidFill>
-                  <a:srgbClr val="675BA7"/>
-                </a:solidFill>
-                <a:latin typeface="Verdana" panose="020B0604030504040204"/>
-                <a:cs typeface="Verdana" panose="020B0604030504040204"/>
-              </a:rPr>
-              <a:t>X”</a:t>
+              <a:t>“X”</a:t>
             </a:r>
             <a:endParaRPr sz="2000">
               <a:latin typeface="Verdana" panose="020B0604030504040204"/>
@@ -18695,9 +18942,11 @@
         <p:spPr/>
         <p:txBody>
           <a:bodyPr/>
+          <a:lstStyle/>
           <a:p>
             <a:fld id="{B6F15528-21DE-4FAA-801E-634DDDAF4B2B}" type="slidenum">
               <a:rPr/>
+              <a:t>3</a:t>
             </a:fld>
             <a:endParaRPr/>
           </a:p>
@@ -18805,7 +19054,6 @@
               <a:rPr spc="-105" dirty="0"/>
               <a:t>System</a:t>
             </a:r>
-            <a:endParaRPr spc="-105" dirty="0"/>
           </a:p>
         </p:txBody>
       </p:sp>
@@ -19121,7 +19369,9 @@
         <p:txBody>
           <a:bodyPr wrap="square" lIns="0" tIns="0" rIns="0" bIns="0" rtlCol="0"/>
           <a:lstStyle/>
-          <a:p/>
+          <a:p>
+            <a:endParaRPr/>
+          </a:p>
         </p:txBody>
       </p:sp>
       <p:sp>
@@ -19162,7 +19412,9 @@
         <p:txBody>
           <a:bodyPr wrap="square" lIns="0" tIns="0" rIns="0" bIns="0" rtlCol="0"/>
           <a:lstStyle/>
-          <a:p/>
+          <a:p>
+            <a:endParaRPr/>
+          </a:p>
         </p:txBody>
       </p:sp>
       <p:sp>
@@ -19203,7 +19455,9 @@
         <p:txBody>
           <a:bodyPr wrap="square" lIns="0" tIns="0" rIns="0" bIns="0" rtlCol="0"/>
           <a:lstStyle/>
-          <a:p/>
+          <a:p>
+            <a:endParaRPr/>
+          </a:p>
         </p:txBody>
       </p:sp>
       <p:sp>
@@ -19244,7 +19498,9 @@
         <p:txBody>
           <a:bodyPr wrap="square" lIns="0" tIns="0" rIns="0" bIns="0" rtlCol="0"/>
           <a:lstStyle/>
-          <a:p/>
+          <a:p>
+            <a:endParaRPr/>
+          </a:p>
         </p:txBody>
       </p:sp>
       <p:sp>
@@ -19285,7 +19541,9 @@
         <p:txBody>
           <a:bodyPr wrap="square" lIns="0" tIns="0" rIns="0" bIns="0" rtlCol="0"/>
           <a:lstStyle/>
-          <a:p/>
+          <a:p>
+            <a:endParaRPr/>
+          </a:p>
         </p:txBody>
       </p:sp>
       <p:sp>
@@ -19326,7 +19584,9 @@
         <p:txBody>
           <a:bodyPr wrap="square" lIns="0" tIns="0" rIns="0" bIns="0" rtlCol="0"/>
           <a:lstStyle/>
-          <a:p/>
+          <a:p>
+            <a:endParaRPr/>
+          </a:p>
         </p:txBody>
       </p:sp>
       <p:sp>
@@ -19412,7 +19672,7 @@
           <p:nvPr/>
         </p:nvPicPr>
         <p:blipFill>
-          <a:blip r:embed="rId1" cstate="print"/>
+          <a:blip r:embed="rId2" cstate="print"/>
           <a:stretch>
             <a:fillRect/>
           </a:stretch>
@@ -19434,7 +19694,7 @@
           <p:nvPr/>
         </p:nvPicPr>
         <p:blipFill>
-          <a:blip r:embed="rId1" cstate="print"/>
+          <a:blip r:embed="rId2" cstate="print"/>
           <a:stretch>
             <a:fillRect/>
           </a:stretch>
@@ -19456,7 +19716,7 @@
           <p:nvPr/>
         </p:nvPicPr>
         <p:blipFill>
-          <a:blip r:embed="rId1" cstate="print"/>
+          <a:blip r:embed="rId2" cstate="print"/>
           <a:stretch>
             <a:fillRect/>
           </a:stretch>
@@ -19478,7 +19738,7 @@
           <p:nvPr/>
         </p:nvPicPr>
         <p:blipFill>
-          <a:blip r:embed="rId1" cstate="print"/>
+          <a:blip r:embed="rId2" cstate="print"/>
           <a:stretch>
             <a:fillRect/>
           </a:stretch>
@@ -19500,7 +19760,7 @@
           <p:nvPr/>
         </p:nvPicPr>
         <p:blipFill>
-          <a:blip r:embed="rId1" cstate="print"/>
+          <a:blip r:embed="rId2" cstate="print"/>
           <a:stretch>
             <a:fillRect/>
           </a:stretch>
@@ -19522,7 +19782,7 @@
           <p:nvPr/>
         </p:nvPicPr>
         <p:blipFill>
-          <a:blip r:embed="rId1" cstate="print"/>
+          <a:blip r:embed="rId2" cstate="print"/>
           <a:stretch>
             <a:fillRect/>
           </a:stretch>
@@ -19544,7 +19804,7 @@
           <p:nvPr/>
         </p:nvPicPr>
         <p:blipFill>
-          <a:blip r:embed="rId2" cstate="print"/>
+          <a:blip r:embed="rId3" cstate="print"/>
           <a:stretch>
             <a:fillRect/>
           </a:stretch>
@@ -19566,7 +19826,7 @@
           <p:nvPr/>
         </p:nvPicPr>
         <p:blipFill>
-          <a:blip r:embed="rId2" cstate="print"/>
+          <a:blip r:embed="rId3" cstate="print"/>
           <a:stretch>
             <a:fillRect/>
           </a:stretch>
@@ -19594,9 +19854,11 @@
         <p:spPr/>
         <p:txBody>
           <a:bodyPr/>
+          <a:lstStyle/>
           <a:p>
             <a:fld id="{B6F15528-21DE-4FAA-801E-634DDDAF4B2B}" type="slidenum">
               <a:rPr/>
+              <a:t>4</a:t>
             </a:fld>
             <a:endParaRPr/>
           </a:p>
@@ -19707,7 +19969,6 @@
               <a:rPr spc="-105" dirty="0"/>
               <a:t>System</a:t>
             </a:r>
-            <a:endParaRPr spc="-105" dirty="0"/>
           </a:p>
         </p:txBody>
       </p:sp>
@@ -20124,7 +20385,9 @@
         <p:txBody>
           <a:bodyPr wrap="square" lIns="0" tIns="0" rIns="0" bIns="0" rtlCol="0"/>
           <a:lstStyle/>
-          <a:p/>
+          <a:p>
+            <a:endParaRPr/>
+          </a:p>
         </p:txBody>
       </p:sp>
       <p:sp>
@@ -20165,7 +20428,9 @@
         <p:txBody>
           <a:bodyPr wrap="square" lIns="0" tIns="0" rIns="0" bIns="0" rtlCol="0"/>
           <a:lstStyle/>
-          <a:p/>
+          <a:p>
+            <a:endParaRPr/>
+          </a:p>
         </p:txBody>
       </p:sp>
       <p:sp>
@@ -20206,7 +20471,9 @@
         <p:txBody>
           <a:bodyPr wrap="square" lIns="0" tIns="0" rIns="0" bIns="0" rtlCol="0"/>
           <a:lstStyle/>
-          <a:p/>
+          <a:p>
+            <a:endParaRPr/>
+          </a:p>
         </p:txBody>
       </p:sp>
       <p:sp>
@@ -20247,7 +20514,9 @@
         <p:txBody>
           <a:bodyPr wrap="square" lIns="0" tIns="0" rIns="0" bIns="0" rtlCol="0"/>
           <a:lstStyle/>
-          <a:p/>
+          <a:p>
+            <a:endParaRPr/>
+          </a:p>
         </p:txBody>
       </p:sp>
       <p:sp>
@@ -20288,7 +20557,9 @@
         <p:txBody>
           <a:bodyPr wrap="square" lIns="0" tIns="0" rIns="0" bIns="0" rtlCol="0"/>
           <a:lstStyle/>
-          <a:p/>
+          <a:p>
+            <a:endParaRPr/>
+          </a:p>
         </p:txBody>
       </p:sp>
       <p:sp>
@@ -20329,7 +20600,9 @@
         <p:txBody>
           <a:bodyPr wrap="square" lIns="0" tIns="0" rIns="0" bIns="0" rtlCol="0"/>
           <a:lstStyle/>
-          <a:p/>
+          <a:p>
+            <a:endParaRPr/>
+          </a:p>
         </p:txBody>
       </p:sp>
       <p:grpSp>
@@ -20397,7 +20670,9 @@
           <p:txBody>
             <a:bodyPr wrap="square" lIns="0" tIns="0" rIns="0" bIns="0" rtlCol="0"/>
             <a:lstStyle/>
-            <a:p/>
+            <a:p>
+              <a:endParaRPr/>
+            </a:p>
           </p:txBody>
         </p:sp>
         <p:pic>
@@ -20407,7 +20682,7 @@
             <p:nvPr/>
           </p:nvPicPr>
           <p:blipFill>
-            <a:blip r:embed="rId1" cstate="print"/>
+            <a:blip r:embed="rId2" cstate="print"/>
             <a:stretch>
               <a:fillRect/>
             </a:stretch>
@@ -20429,7 +20704,7 @@
             <p:nvPr/>
           </p:nvPicPr>
           <p:blipFill>
-            <a:blip r:embed="rId2" cstate="print"/>
+            <a:blip r:embed="rId3" cstate="print"/>
             <a:stretch>
               <a:fillRect/>
             </a:stretch>
@@ -20451,7 +20726,7 @@
             <p:nvPr/>
           </p:nvPicPr>
           <p:blipFill>
-            <a:blip r:embed="rId3" cstate="print"/>
+            <a:blip r:embed="rId4" cstate="print"/>
             <a:stretch>
               <a:fillRect/>
             </a:stretch>
@@ -20473,7 +20748,7 @@
             <p:nvPr/>
           </p:nvPicPr>
           <p:blipFill>
-            <a:blip r:embed="rId3" cstate="print"/>
+            <a:blip r:embed="rId4" cstate="print"/>
             <a:stretch>
               <a:fillRect/>
             </a:stretch>
@@ -20495,7 +20770,7 @@
             <p:nvPr/>
           </p:nvPicPr>
           <p:blipFill>
-            <a:blip r:embed="rId3" cstate="print"/>
+            <a:blip r:embed="rId4" cstate="print"/>
             <a:stretch>
               <a:fillRect/>
             </a:stretch>
@@ -20517,7 +20792,7 @@
             <p:nvPr/>
           </p:nvPicPr>
           <p:blipFill>
-            <a:blip r:embed="rId2" cstate="print"/>
+            <a:blip r:embed="rId3" cstate="print"/>
             <a:stretch>
               <a:fillRect/>
             </a:stretch>
@@ -20539,7 +20814,7 @@
             <p:nvPr/>
           </p:nvPicPr>
           <p:blipFill>
-            <a:blip r:embed="rId2" cstate="print"/>
+            <a:blip r:embed="rId3" cstate="print"/>
             <a:stretch>
               <a:fillRect/>
             </a:stretch>
@@ -20591,7 +20866,9 @@
           <p:txBody>
             <a:bodyPr wrap="square" lIns="0" tIns="0" rIns="0" bIns="0" rtlCol="0"/>
             <a:lstStyle/>
-            <a:p/>
+            <a:p>
+              <a:endParaRPr/>
+            </a:p>
           </p:txBody>
         </p:sp>
         <p:sp>
@@ -20631,7 +20908,9 @@
           <p:txBody>
             <a:bodyPr wrap="square" lIns="0" tIns="0" rIns="0" bIns="0" rtlCol="0"/>
             <a:lstStyle/>
-            <a:p/>
+            <a:p>
+              <a:endParaRPr/>
+            </a:p>
           </p:txBody>
         </p:sp>
         <p:sp>
@@ -20671,7 +20950,9 @@
           <p:txBody>
             <a:bodyPr wrap="square" lIns="0" tIns="0" rIns="0" bIns="0" rtlCol="0"/>
             <a:lstStyle/>
-            <a:p/>
+            <a:p>
+              <a:endParaRPr/>
+            </a:p>
           </p:txBody>
         </p:sp>
         <p:pic>
@@ -20681,7 +20962,7 @@
             <p:nvPr/>
           </p:nvPicPr>
           <p:blipFill>
-            <a:blip r:embed="rId4" cstate="print"/>
+            <a:blip r:embed="rId5" cstate="print"/>
             <a:stretch>
               <a:fillRect/>
             </a:stretch>
@@ -20703,7 +20984,7 @@
             <p:nvPr/>
           </p:nvPicPr>
           <p:blipFill>
-            <a:blip r:embed="rId4" cstate="print"/>
+            <a:blip r:embed="rId5" cstate="print"/>
             <a:stretch>
               <a:fillRect/>
             </a:stretch>
@@ -20725,7 +21006,7 @@
             <p:nvPr/>
           </p:nvPicPr>
           <p:blipFill>
-            <a:blip r:embed="rId4" cstate="print"/>
+            <a:blip r:embed="rId5" cstate="print"/>
             <a:stretch>
               <a:fillRect/>
             </a:stretch>
@@ -20748,7 +21029,7 @@
           <p:nvPr/>
         </p:nvPicPr>
         <p:blipFill>
-          <a:blip r:embed="rId5" cstate="print"/>
+          <a:blip r:embed="rId6" cstate="print"/>
           <a:stretch>
             <a:fillRect/>
           </a:stretch>
@@ -20770,7 +21051,7 @@
           <p:nvPr/>
         </p:nvPicPr>
         <p:blipFill>
-          <a:blip r:embed="rId5" cstate="print"/>
+          <a:blip r:embed="rId6" cstate="print"/>
           <a:stretch>
             <a:fillRect/>
           </a:stretch>
@@ -20792,7 +21073,7 @@
           <p:nvPr/>
         </p:nvPicPr>
         <p:blipFill>
-          <a:blip r:embed="rId5" cstate="print"/>
+          <a:blip r:embed="rId6" cstate="print"/>
           <a:stretch>
             <a:fillRect/>
           </a:stretch>
@@ -20814,7 +21095,7 @@
           <p:nvPr/>
         </p:nvPicPr>
         <p:blipFill>
-          <a:blip r:embed="rId5" cstate="print"/>
+          <a:blip r:embed="rId6" cstate="print"/>
           <a:stretch>
             <a:fillRect/>
           </a:stretch>
@@ -20836,7 +21117,7 @@
           <p:nvPr/>
         </p:nvPicPr>
         <p:blipFill>
-          <a:blip r:embed="rId5" cstate="print"/>
+          <a:blip r:embed="rId6" cstate="print"/>
           <a:stretch>
             <a:fillRect/>
           </a:stretch>
@@ -20858,7 +21139,7 @@
           <p:nvPr/>
         </p:nvPicPr>
         <p:blipFill>
-          <a:blip r:embed="rId5" cstate="print"/>
+          <a:blip r:embed="rId6" cstate="print"/>
           <a:stretch>
             <a:fillRect/>
           </a:stretch>
@@ -21085,9 +21366,11 @@
         <p:spPr/>
         <p:txBody>
           <a:bodyPr/>
+          <a:lstStyle/>
           <a:p>
             <a:fld id="{B6F15528-21DE-4FAA-801E-634DDDAF4B2B}" type="slidenum">
               <a:rPr/>
+              <a:t>5</a:t>
             </a:fld>
             <a:endParaRPr/>
           </a:p>
@@ -21196,7 +21479,9 @@
         <p:txBody>
           <a:bodyPr wrap="square" lIns="0" tIns="0" rIns="0" bIns="0" rtlCol="0"/>
           <a:lstStyle/>
-          <a:p/>
+          <a:p>
+            <a:endParaRPr/>
+          </a:p>
         </p:txBody>
       </p:sp>
       <p:grpSp>
@@ -21291,7 +21576,9 @@
           <p:txBody>
             <a:bodyPr wrap="square" lIns="0" tIns="0" rIns="0" bIns="0" rtlCol="0"/>
             <a:lstStyle/>
-            <a:p/>
+            <a:p>
+              <a:endParaRPr/>
+            </a:p>
           </p:txBody>
         </p:sp>
         <p:sp>
@@ -21332,7 +21619,9 @@
           <p:txBody>
             <a:bodyPr wrap="square" lIns="0" tIns="0" rIns="0" bIns="0" rtlCol="0"/>
             <a:lstStyle/>
-            <a:p/>
+            <a:p>
+              <a:endParaRPr/>
+            </a:p>
           </p:txBody>
         </p:sp>
         <p:sp>
@@ -21373,7 +21662,9 @@
           <p:txBody>
             <a:bodyPr wrap="square" lIns="0" tIns="0" rIns="0" bIns="0" rtlCol="0"/>
             <a:lstStyle/>
-            <a:p/>
+            <a:p>
+              <a:endParaRPr/>
+            </a:p>
           </p:txBody>
         </p:sp>
         <p:sp>
@@ -21414,7 +21705,9 @@
           <p:txBody>
             <a:bodyPr wrap="square" lIns="0" tIns="0" rIns="0" bIns="0" rtlCol="0"/>
             <a:lstStyle/>
-            <a:p/>
+            <a:p>
+              <a:endParaRPr/>
+            </a:p>
           </p:txBody>
         </p:sp>
       </p:grpSp>
@@ -21495,7 +21788,6 @@
               <a:rPr spc="-50" dirty="0"/>
               <a:t>Differentiate</a:t>
             </a:r>
-            <a:endParaRPr spc="-50" dirty="0"/>
           </a:p>
         </p:txBody>
       </p:sp>
@@ -21663,7 +21955,9 @@
         <p:txBody>
           <a:bodyPr wrap="square" lIns="0" tIns="0" rIns="0" bIns="0" rtlCol="0"/>
           <a:lstStyle/>
-          <a:p/>
+          <a:p>
+            <a:endParaRPr/>
+          </a:p>
         </p:txBody>
       </p:sp>
       <p:sp>
@@ -21704,7 +21998,9 @@
         <p:txBody>
           <a:bodyPr wrap="square" lIns="0" tIns="0" rIns="0" bIns="0" rtlCol="0"/>
           <a:lstStyle/>
-          <a:p/>
+          <a:p>
+            <a:endParaRPr/>
+          </a:p>
         </p:txBody>
       </p:sp>
       <p:sp>
@@ -21745,7 +22041,9 @@
         <p:txBody>
           <a:bodyPr wrap="square" lIns="0" tIns="0" rIns="0" bIns="0" rtlCol="0"/>
           <a:lstStyle/>
-          <a:p/>
+          <a:p>
+            <a:endParaRPr/>
+          </a:p>
         </p:txBody>
       </p:sp>
       <p:pic>
@@ -21755,7 +22053,7 @@
           <p:nvPr/>
         </p:nvPicPr>
         <p:blipFill>
-          <a:blip r:embed="rId1" cstate="print"/>
+          <a:blip r:embed="rId2" cstate="print"/>
           <a:stretch>
             <a:fillRect/>
           </a:stretch>
@@ -21777,7 +22075,7 @@
           <p:nvPr/>
         </p:nvPicPr>
         <p:blipFill>
-          <a:blip r:embed="rId1" cstate="print"/>
+          <a:blip r:embed="rId2" cstate="print"/>
           <a:stretch>
             <a:fillRect/>
           </a:stretch>
@@ -21799,7 +22097,7 @@
           <p:nvPr/>
         </p:nvPicPr>
         <p:blipFill>
-          <a:blip r:embed="rId1" cstate="print"/>
+          <a:blip r:embed="rId2" cstate="print"/>
           <a:stretch>
             <a:fillRect/>
           </a:stretch>
@@ -21821,7 +22119,7 @@
           <p:nvPr/>
         </p:nvPicPr>
         <p:blipFill>
-          <a:blip r:embed="rId1" cstate="print"/>
+          <a:blip r:embed="rId2" cstate="print"/>
           <a:stretch>
             <a:fillRect/>
           </a:stretch>
@@ -22176,77 +22474,177 @@
                 <a:latin typeface="Verdana" panose="020B0604030504040204"/>
                 <a:cs typeface="Verdana" panose="020B0604030504040204"/>
               </a:rPr>
-              <a:t>e</a:t>
-            </a:r>
-            <a:r>
-              <a:rPr sz="2000" spc="50" dirty="0">
+              <a:t>ed</a:t>
+            </a:r>
+            <a:r>
+              <a:rPr sz="2000" spc="-210" dirty="0">
                 <a:solidFill>
                   <a:srgbClr val="2A9FBC"/>
                 </a:solidFill>
                 <a:latin typeface="Verdana" panose="020B0604030504040204"/>
                 <a:cs typeface="Verdana" panose="020B0604030504040204"/>
               </a:rPr>
-              <a:t>d</a:t>
-            </a:r>
-            <a:r>
-              <a:rPr sz="2000" spc="-210" dirty="0">
+              <a:t>I</a:t>
+            </a:r>
+            <a:r>
+              <a:rPr sz="2000" spc="-35" dirty="0">
                 <a:solidFill>
                   <a:srgbClr val="2A9FBC"/>
                 </a:solidFill>
                 <a:latin typeface="Verdana" panose="020B0604030504040204"/>
                 <a:cs typeface="Verdana" panose="020B0604030504040204"/>
               </a:rPr>
-              <a:t>I</a:t>
-            </a:r>
-            <a:r>
-              <a:rPr sz="2000" spc="-35" dirty="0">
+              <a:t>n</a:t>
+            </a:r>
+            <a:r>
+              <a:rPr sz="2000" spc="-355" dirty="0">
                 <a:solidFill>
                   <a:srgbClr val="2A9FBC"/>
                 </a:solidFill>
                 <a:latin typeface="Verdana" panose="020B0604030504040204"/>
                 <a:cs typeface="Verdana" panose="020B0604030504040204"/>
               </a:rPr>
-              <a:t>n</a:t>
-            </a:r>
-            <a:r>
-              <a:rPr sz="2000" spc="-355" dirty="0">
+              <a:t>:</a:t>
+            </a:r>
+            <a:r>
+              <a:rPr sz="2000" spc="-90" dirty="0">
                 <a:solidFill>
                   <a:srgbClr val="2A9FBC"/>
                 </a:solidFill>
                 <a:latin typeface="Verdana" panose="020B0604030504040204"/>
                 <a:cs typeface="Verdana" panose="020B0604030504040204"/>
               </a:rPr>
-              <a:t>:</a:t>
-            </a:r>
-            <a:r>
-              <a:rPr sz="2000" spc="-90" dirty="0">
+              <a:t> </a:t>
+            </a:r>
+            <a:r>
+              <a:rPr sz="2000" spc="-340" dirty="0">
                 <a:solidFill>
                   <a:srgbClr val="2A9FBC"/>
                 </a:solidFill>
                 <a:latin typeface="Verdana" panose="020B0604030504040204"/>
                 <a:cs typeface="Verdana" panose="020B0604030504040204"/>
               </a:rPr>
+              <a:t>1,</a:t>
+            </a:r>
+            <a:r>
+              <a:rPr sz="2000" spc="145" dirty="0">
+                <a:solidFill>
+                  <a:srgbClr val="2A9FBC"/>
+                </a:solidFill>
+                <a:latin typeface="Verdana" panose="020B0604030504040204"/>
+                <a:cs typeface="Verdana" panose="020B0604030504040204"/>
+              </a:rPr>
+              <a:t>400</a:t>
+            </a:r>
+            <a:r>
+              <a:rPr sz="2000" spc="-105" dirty="0">
+                <a:solidFill>
+                  <a:srgbClr val="2A9FBC"/>
+                </a:solidFill>
+                <a:latin typeface="Verdana" panose="020B0604030504040204"/>
+                <a:cs typeface="Verdana" panose="020B0604030504040204"/>
+              </a:rPr>
               <a:t> </a:t>
             </a:r>
             <a:r>
-              <a:rPr sz="2000" spc="-340" dirty="0">
+              <a:rPr sz="2000" spc="85" dirty="0">
                 <a:solidFill>
                   <a:srgbClr val="2A9FBC"/>
                 </a:solidFill>
                 <a:latin typeface="Verdana" panose="020B0604030504040204"/>
                 <a:cs typeface="Verdana" panose="020B0604030504040204"/>
               </a:rPr>
-              <a:t>1,</a:t>
-            </a:r>
-            <a:r>
-              <a:rPr sz="2000" spc="145" dirty="0">
+              <a:t>b</a:t>
+            </a:r>
+            <a:r>
+              <a:rPr sz="2000" spc="-65" dirty="0">
                 <a:solidFill>
                   <a:srgbClr val="2A9FBC"/>
                 </a:solidFill>
                 <a:latin typeface="Verdana" panose="020B0604030504040204"/>
                 <a:cs typeface="Verdana" panose="020B0604030504040204"/>
               </a:rPr>
-              <a:t>400</a:t>
+              <a:t>r</a:t>
+            </a:r>
+            <a:r>
+              <a:rPr sz="2000" spc="95" dirty="0">
+                <a:solidFill>
+                  <a:srgbClr val="2A9FBC"/>
+                </a:solidFill>
+                <a:latin typeface="Verdana" panose="020B0604030504040204"/>
+                <a:cs typeface="Verdana" panose="020B0604030504040204"/>
+              </a:rPr>
+              <a:t>o</a:t>
+            </a:r>
+            <a:r>
+              <a:rPr sz="2000" spc="-75" dirty="0">
+                <a:solidFill>
+                  <a:srgbClr val="2A9FBC"/>
+                </a:solidFill>
+                <a:latin typeface="Verdana" panose="020B0604030504040204"/>
+                <a:cs typeface="Verdana" panose="020B0604030504040204"/>
+              </a:rPr>
+              <a:t>k</a:t>
+            </a:r>
+            <a:r>
+              <a:rPr sz="2000" spc="-10" dirty="0">
+                <a:solidFill>
+                  <a:srgbClr val="2A9FBC"/>
+                </a:solidFill>
+                <a:latin typeface="Verdana" panose="020B0604030504040204"/>
+                <a:cs typeface="Verdana" panose="020B0604030504040204"/>
+              </a:rPr>
+              <a:t>er</a:t>
+            </a:r>
+            <a:r>
+              <a:rPr sz="2000" spc="-45" dirty="0">
+                <a:solidFill>
+                  <a:srgbClr val="2A9FBC"/>
+                </a:solidFill>
+                <a:latin typeface="Verdana" panose="020B0604030504040204"/>
+                <a:cs typeface="Verdana" panose="020B0604030504040204"/>
+              </a:rPr>
+              <a:t>s</a:t>
+            </a:r>
+            <a:r>
+              <a:rPr sz="2000" spc="-110" dirty="0">
+                <a:solidFill>
+                  <a:srgbClr val="2A9FBC"/>
+                </a:solidFill>
+                <a:latin typeface="Verdana" panose="020B0604030504040204"/>
+                <a:cs typeface="Verdana" panose="020B0604030504040204"/>
+              </a:rPr>
+              <a:t> </a:t>
+            </a:r>
+            <a:r>
+              <a:rPr sz="2000" spc="-370" dirty="0">
+                <a:solidFill>
+                  <a:srgbClr val="2A9FBC"/>
+                </a:solidFill>
+                <a:latin typeface="Verdana" panose="020B0604030504040204"/>
+                <a:cs typeface="Verdana" panose="020B0604030504040204"/>
+              </a:rPr>
+              <a:t>=&gt;</a:t>
+            </a:r>
+            <a:r>
+              <a:rPr sz="2000" spc="-110" dirty="0">
+                <a:solidFill>
+                  <a:srgbClr val="2A9FBC"/>
+                </a:solidFill>
+                <a:latin typeface="Verdana" panose="020B0604030504040204"/>
+                <a:cs typeface="Verdana" panose="020B0604030504040204"/>
+              </a:rPr>
+              <a:t> </a:t>
+            </a:r>
+            <a:r>
+              <a:rPr sz="2000" spc="-50" dirty="0">
+                <a:solidFill>
+                  <a:srgbClr val="2A9FBC"/>
+                </a:solidFill>
+                <a:latin typeface="Verdana" panose="020B0604030504040204"/>
+                <a:cs typeface="Verdana" panose="020B0604030504040204"/>
+              </a:rPr>
+              <a:t>2</a:t>
             </a:r>
             <a:r>
               <a:rPr sz="2000" spc="-105" dirty="0">
@@ -22266,167 +22664,47 @@
                 <a:latin typeface="Verdana" panose="020B0604030504040204"/>
                 <a:cs typeface="Verdana" panose="020B0604030504040204"/>
               </a:rPr>
+              <a:t>p</a:t>
+            </a:r>
+            <a:r>
+              <a:rPr sz="2000" spc="5" dirty="0">
+                <a:solidFill>
+                  <a:srgbClr val="2A9FBC"/>
+                </a:solidFill>
+                <a:latin typeface="Verdana" panose="020B0604030504040204"/>
+                <a:cs typeface="Verdana" panose="020B0604030504040204"/>
+              </a:rPr>
+              <a:t>et</a:t>
+            </a:r>
+            <a:r>
+              <a:rPr sz="2000" dirty="0">
+                <a:solidFill>
+                  <a:srgbClr val="2A9FBC"/>
+                </a:solidFill>
+                <a:latin typeface="Verdana" panose="020B0604030504040204"/>
+                <a:cs typeface="Verdana" panose="020B0604030504040204"/>
+              </a:rPr>
+              <a:t>a</a:t>
+            </a:r>
+            <a:r>
+              <a:rPr sz="2000" spc="35" dirty="0">
+                <a:solidFill>
+                  <a:srgbClr val="2A9FBC"/>
+                </a:solidFill>
+                <a:latin typeface="Verdana" panose="020B0604030504040204"/>
+                <a:cs typeface="Verdana" panose="020B0604030504040204"/>
+              </a:rPr>
               <a:t>b</a:t>
             </a:r>
             <a:r>
-              <a:rPr sz="2000" spc="-65" dirty="0">
+              <a:rPr sz="2000" dirty="0">
                 <a:solidFill>
                   <a:srgbClr val="2A9FBC"/>
                 </a:solidFill>
                 <a:latin typeface="Verdana" panose="020B0604030504040204"/>
                 <a:cs typeface="Verdana" panose="020B0604030504040204"/>
               </a:rPr>
-              <a:t>r</a:t>
-            </a:r>
-            <a:r>
-              <a:rPr sz="2000" spc="95" dirty="0">
-                <a:solidFill>
-                  <a:srgbClr val="2A9FBC"/>
-                </a:solidFill>
-                <a:latin typeface="Verdana" panose="020B0604030504040204"/>
-                <a:cs typeface="Verdana" panose="020B0604030504040204"/>
-              </a:rPr>
-              <a:t>o</a:t>
-            </a:r>
-            <a:r>
-              <a:rPr sz="2000" spc="-75" dirty="0">
-                <a:solidFill>
-                  <a:srgbClr val="2A9FBC"/>
-                </a:solidFill>
-                <a:latin typeface="Verdana" panose="020B0604030504040204"/>
-                <a:cs typeface="Verdana" panose="020B0604030504040204"/>
-              </a:rPr>
-              <a:t>k</a:t>
-            </a:r>
-            <a:r>
-              <a:rPr sz="2000" spc="-10" dirty="0">
-                <a:solidFill>
-                  <a:srgbClr val="2A9FBC"/>
-                </a:solidFill>
-                <a:latin typeface="Verdana" panose="020B0604030504040204"/>
-                <a:cs typeface="Verdana" panose="020B0604030504040204"/>
-              </a:rPr>
-              <a:t>er</a:t>
-            </a:r>
-            <a:r>
-              <a:rPr sz="2000" spc="-45" dirty="0">
-                <a:solidFill>
-                  <a:srgbClr val="2A9FBC"/>
-                </a:solidFill>
-                <a:latin typeface="Verdana" panose="020B0604030504040204"/>
-                <a:cs typeface="Verdana" panose="020B0604030504040204"/>
-              </a:rPr>
-              <a:t>s</a:t>
-            </a:r>
-            <a:r>
-              <a:rPr sz="2000" spc="-110" dirty="0">
-                <a:solidFill>
-                  <a:srgbClr val="2A9FBC"/>
-                </a:solidFill>
-                <a:latin typeface="Verdana" panose="020B0604030504040204"/>
-                <a:cs typeface="Verdana" panose="020B0604030504040204"/>
-              </a:rPr>
-              <a:t> </a:t>
-            </a:r>
-            <a:r>
-              <a:rPr sz="2000" spc="-370" dirty="0">
-                <a:solidFill>
-                  <a:srgbClr val="2A9FBC"/>
-                </a:solidFill>
-                <a:latin typeface="Verdana" panose="020B0604030504040204"/>
-                <a:cs typeface="Verdana" panose="020B0604030504040204"/>
-              </a:rPr>
-              <a:t>=&gt;</a:t>
-            </a:r>
-            <a:r>
-              <a:rPr sz="2000" spc="-110" dirty="0">
-                <a:solidFill>
-                  <a:srgbClr val="2A9FBC"/>
-                </a:solidFill>
-                <a:latin typeface="Verdana" panose="020B0604030504040204"/>
-                <a:cs typeface="Verdana" panose="020B0604030504040204"/>
-              </a:rPr>
-              <a:t> </a:t>
-            </a:r>
-            <a:r>
-              <a:rPr sz="2000" spc="-50" dirty="0">
-                <a:solidFill>
-                  <a:srgbClr val="2A9FBC"/>
-                </a:solidFill>
-                <a:latin typeface="Verdana" panose="020B0604030504040204"/>
-                <a:cs typeface="Verdana" panose="020B0604030504040204"/>
-              </a:rPr>
-              <a:t>2</a:t>
-            </a:r>
-            <a:r>
-              <a:rPr sz="2000" spc="-105" dirty="0">
-                <a:solidFill>
-                  <a:srgbClr val="2A9FBC"/>
-                </a:solidFill>
-                <a:latin typeface="Verdana" panose="020B0604030504040204"/>
-                <a:cs typeface="Verdana" panose="020B0604030504040204"/>
-              </a:rPr>
-              <a:t> </a:t>
-            </a:r>
-            <a:r>
-              <a:rPr sz="2000" spc="85" dirty="0">
-                <a:solidFill>
-                  <a:srgbClr val="2A9FBC"/>
-                </a:solidFill>
-                <a:latin typeface="Verdana" panose="020B0604030504040204"/>
-                <a:cs typeface="Verdana" panose="020B0604030504040204"/>
-              </a:rPr>
-              <a:t>p</a:t>
-            </a:r>
-            <a:r>
-              <a:rPr sz="2000" spc="5" dirty="0">
-                <a:solidFill>
-                  <a:srgbClr val="2A9FBC"/>
-                </a:solidFill>
-                <a:latin typeface="Verdana" panose="020B0604030504040204"/>
-                <a:cs typeface="Verdana" panose="020B0604030504040204"/>
-              </a:rPr>
-              <a:t>et</a:t>
-            </a:r>
-            <a:r>
-              <a:rPr sz="2000" dirty="0">
-                <a:solidFill>
-                  <a:srgbClr val="2A9FBC"/>
-                </a:solidFill>
-                <a:latin typeface="Verdana" panose="020B0604030504040204"/>
-                <a:cs typeface="Verdana" panose="020B0604030504040204"/>
-              </a:rPr>
-              <a:t>a</a:t>
-            </a:r>
-            <a:r>
-              <a:rPr sz="2000" spc="35" dirty="0">
-                <a:solidFill>
-                  <a:srgbClr val="2A9FBC"/>
-                </a:solidFill>
-                <a:latin typeface="Verdana" panose="020B0604030504040204"/>
-                <a:cs typeface="Verdana" panose="020B0604030504040204"/>
-              </a:rPr>
-              <a:t>b</a:t>
-            </a:r>
-            <a:r>
-              <a:rPr sz="2000" dirty="0">
-                <a:solidFill>
-                  <a:srgbClr val="2A9FBC"/>
-                </a:solidFill>
-                <a:latin typeface="Verdana" panose="020B0604030504040204"/>
-                <a:cs typeface="Verdana" panose="020B0604030504040204"/>
-              </a:rPr>
-              <a:t>y</a:t>
-            </a:r>
-            <a:r>
-              <a:rPr sz="2000" dirty="0">
-                <a:solidFill>
-                  <a:srgbClr val="2A9FBC"/>
-                </a:solidFill>
-                <a:latin typeface="Verdana" panose="020B0604030504040204"/>
-                <a:cs typeface="Verdana" panose="020B0604030504040204"/>
-              </a:rPr>
-              <a:t>t</a:t>
+              <a:t>yt</a:t>
             </a:r>
             <a:r>
               <a:rPr sz="2000" spc="-15" dirty="0">
@@ -22512,7 +22790,7 @@
           <p:nvPr/>
         </p:nvPicPr>
         <p:blipFill>
-          <a:blip r:embed="rId1" cstate="print"/>
+          <a:blip r:embed="rId2" cstate="print"/>
           <a:stretch>
             <a:fillRect/>
           </a:stretch>
@@ -22534,7 +22812,7 @@
           <p:nvPr/>
         </p:nvPicPr>
         <p:blipFill>
-          <a:blip r:embed="rId1" cstate="print"/>
+          <a:blip r:embed="rId2" cstate="print"/>
           <a:stretch>
             <a:fillRect/>
           </a:stretch>
@@ -22594,7 +22872,9 @@
         <p:txBody>
           <a:bodyPr wrap="square" lIns="0" tIns="0" rIns="0" bIns="0" rtlCol="0"/>
           <a:lstStyle/>
-          <a:p/>
+          <a:p>
+            <a:endParaRPr/>
+          </a:p>
         </p:txBody>
       </p:sp>
       <p:graphicFrame>
@@ -22607,7 +22887,7 @@
         </p:nvGraphicFramePr>
         <p:xfrm>
           <a:off x="4778502" y="2642616"/>
-          <a:ext cx="2680970" cy="2275840"/>
+          <a:ext cx="2643505" cy="2250186"/>
         </p:xfrm>
         <a:graphic>
           <a:graphicData uri="http://schemas.openxmlformats.org/drawingml/2006/table">
@@ -22616,8 +22896,20 @@
                 <a:tableStyleId>{2D5ABB26-0587-4C30-8999-92F81FD0307C}</a:tableStyleId>
               </a:tblPr>
               <a:tblGrid>
-                <a:gridCol w="1323340"/>
-                <a:gridCol w="1320165"/>
+                <a:gridCol w="1323340">
+                  <a:extLst>
+                    <a:ext uri="{9D8B030D-6E8A-4147-A177-3AD203B41FA5}">
+                      <a16:colId xmlns:a16="http://schemas.microsoft.com/office/drawing/2014/main" val="20000"/>
+                    </a:ext>
+                  </a:extLst>
+                </a:gridCol>
+                <a:gridCol w="1320165">
+                  <a:extLst>
+                    <a:ext uri="{9D8B030D-6E8A-4147-A177-3AD203B41FA5}">
+                      <a16:colId xmlns:a16="http://schemas.microsoft.com/office/drawing/2014/main" val="20001"/>
+                    </a:ext>
+                  </a:extLst>
+                </a:gridCol>
               </a:tblGrid>
               <a:tr h="1097280">
                 <a:tc>
@@ -22754,6 +23046,11 @@
                     </a:lnB>
                   </a:tcPr>
                 </a:tc>
+                <a:extLst>
+                  <a:ext uri="{0D108BD9-81ED-4DB2-BD59-A6C34878D82A}">
+                    <a16:rowId xmlns:a16="http://schemas.microsoft.com/office/drawing/2014/main" val="10000"/>
+                  </a:ext>
+                </a:extLst>
               </a:tr>
               <a:tr h="1152906">
                 <a:tc>
@@ -22890,6 +23187,11 @@
                     </a:lnB>
                   </a:tcPr>
                 </a:tc>
+                <a:extLst>
+                  <a:ext uri="{0D108BD9-81ED-4DB2-BD59-A6C34878D82A}">
+                    <a16:rowId xmlns:a16="http://schemas.microsoft.com/office/drawing/2014/main" val="10001"/>
+                  </a:ext>
+                </a:extLst>
               </a:tr>
             </a:tbl>
           </a:graphicData>
@@ -22940,7 +23242,9 @@
         <p:txBody>
           <a:bodyPr wrap="square" lIns="0" tIns="0" rIns="0" bIns="0" rtlCol="0"/>
           <a:lstStyle/>
-          <a:p/>
+          <a:p>
+            <a:endParaRPr/>
+          </a:p>
         </p:txBody>
       </p:sp>
       <p:sp>
@@ -22988,7 +23292,9 @@
         <p:txBody>
           <a:bodyPr wrap="square" lIns="0" tIns="0" rIns="0" bIns="0" rtlCol="0"/>
           <a:lstStyle/>
-          <a:p/>
+          <a:p>
+            <a:endParaRPr/>
+          </a:p>
         </p:txBody>
       </p:sp>
       <p:sp>
@@ -23036,7 +23342,9 @@
         <p:txBody>
           <a:bodyPr wrap="square" lIns="0" tIns="0" rIns="0" bIns="0" rtlCol="0"/>
           <a:lstStyle/>
-          <a:p/>
+          <a:p>
+            <a:endParaRPr/>
+          </a:p>
         </p:txBody>
       </p:sp>
       <p:pic>
@@ -23046,7 +23354,7 @@
           <p:nvPr/>
         </p:nvPicPr>
         <p:blipFill>
-          <a:blip r:embed="rId2" cstate="print"/>
+          <a:blip r:embed="rId3" cstate="print"/>
           <a:stretch>
             <a:fillRect/>
           </a:stretch>
@@ -23068,7 +23376,7 @@
           <p:nvPr/>
         </p:nvPicPr>
         <p:blipFill>
-          <a:blip r:embed="rId2" cstate="print"/>
+          <a:blip r:embed="rId3" cstate="print"/>
           <a:stretch>
             <a:fillRect/>
           </a:stretch>
@@ -23090,7 +23398,7 @@
           <p:nvPr/>
         </p:nvPicPr>
         <p:blipFill>
-          <a:blip r:embed="rId2" cstate="print"/>
+          <a:blip r:embed="rId3" cstate="print"/>
           <a:stretch>
             <a:fillRect/>
           </a:stretch>
@@ -23112,7 +23420,7 @@
           <p:nvPr/>
         </p:nvPicPr>
         <p:blipFill>
-          <a:blip r:embed="rId2" cstate="print"/>
+          <a:blip r:embed="rId3" cstate="print"/>
           <a:stretch>
             <a:fillRect/>
           </a:stretch>
@@ -23140,9 +23448,11 @@
         <p:spPr/>
         <p:txBody>
           <a:bodyPr/>
+          <a:lstStyle/>
           <a:p>
             <a:fld id="{B6F15528-21DE-4FAA-801E-634DDDAF4B2B}" type="slidenum">
               <a:rPr/>
+              <a:t>6</a:t>
             </a:fld>
             <a:endParaRPr/>
           </a:p>
@@ -23234,7 +23544,6 @@
               <a:rPr spc="-45" dirty="0"/>
               <a:t>Cluster</a:t>
             </a:r>
-            <a:endParaRPr spc="-45" dirty="0"/>
           </a:p>
         </p:txBody>
       </p:sp>
@@ -23453,7 +23762,9 @@
         <p:txBody>
           <a:bodyPr wrap="square" lIns="0" tIns="0" rIns="0" bIns="0" rtlCol="0"/>
           <a:lstStyle/>
-          <a:p/>
+          <a:p>
+            <a:endParaRPr/>
+          </a:p>
         </p:txBody>
       </p:sp>
       <p:sp>
@@ -23494,7 +23805,9 @@
         <p:txBody>
           <a:bodyPr wrap="square" lIns="0" tIns="0" rIns="0" bIns="0" rtlCol="0"/>
           <a:lstStyle/>
-          <a:p/>
+          <a:p>
+            <a:endParaRPr/>
+          </a:p>
         </p:txBody>
       </p:sp>
       <p:sp>
@@ -23535,7 +23848,9 @@
         <p:txBody>
           <a:bodyPr wrap="square" lIns="0" tIns="0" rIns="0" bIns="0" rtlCol="0"/>
           <a:lstStyle/>
-          <a:p/>
+          <a:p>
+            <a:endParaRPr/>
+          </a:p>
         </p:txBody>
       </p:sp>
       <p:sp>
@@ -23576,7 +23891,9 @@
         <p:txBody>
           <a:bodyPr wrap="square" lIns="0" tIns="0" rIns="0" bIns="0" rtlCol="0"/>
           <a:lstStyle/>
-          <a:p/>
+          <a:p>
+            <a:endParaRPr/>
+          </a:p>
         </p:txBody>
       </p:sp>
       <p:sp>
@@ -23617,7 +23934,9 @@
         <p:txBody>
           <a:bodyPr wrap="square" lIns="0" tIns="0" rIns="0" bIns="0" rtlCol="0"/>
           <a:lstStyle/>
-          <a:p/>
+          <a:p>
+            <a:endParaRPr/>
+          </a:p>
         </p:txBody>
       </p:sp>
       <p:sp>
@@ -23658,7 +23977,9 @@
         <p:txBody>
           <a:bodyPr wrap="square" lIns="0" tIns="0" rIns="0" bIns="0" rtlCol="0"/>
           <a:lstStyle/>
-          <a:p/>
+          <a:p>
+            <a:endParaRPr/>
+          </a:p>
         </p:txBody>
       </p:sp>
       <p:pic>
@@ -23668,7 +23989,7 @@
           <p:nvPr/>
         </p:nvPicPr>
         <p:blipFill>
-          <a:blip r:embed="rId1" cstate="print"/>
+          <a:blip r:embed="rId2" cstate="print"/>
           <a:stretch>
             <a:fillRect/>
           </a:stretch>
@@ -23690,7 +24011,7 @@
           <p:nvPr/>
         </p:nvPicPr>
         <p:blipFill>
-          <a:blip r:embed="rId1" cstate="print"/>
+          <a:blip r:embed="rId2" cstate="print"/>
           <a:stretch>
             <a:fillRect/>
           </a:stretch>
@@ -23712,7 +24033,7 @@
           <p:nvPr/>
         </p:nvPicPr>
         <p:blipFill>
-          <a:blip r:embed="rId1" cstate="print"/>
+          <a:blip r:embed="rId2" cstate="print"/>
           <a:stretch>
             <a:fillRect/>
           </a:stretch>
@@ -23734,7 +24055,7 @@
           <p:nvPr/>
         </p:nvPicPr>
         <p:blipFill>
-          <a:blip r:embed="rId1" cstate="print"/>
+          <a:blip r:embed="rId2" cstate="print"/>
           <a:stretch>
             <a:fillRect/>
           </a:stretch>
@@ -23756,7 +24077,7 @@
           <p:nvPr/>
         </p:nvPicPr>
         <p:blipFill>
-          <a:blip r:embed="rId1" cstate="print"/>
+          <a:blip r:embed="rId2" cstate="print"/>
           <a:stretch>
             <a:fillRect/>
           </a:stretch>
@@ -23778,7 +24099,7 @@
           <p:nvPr/>
         </p:nvPicPr>
         <p:blipFill>
-          <a:blip r:embed="rId1" cstate="print"/>
+          <a:blip r:embed="rId2" cstate="print"/>
           <a:stretch>
             <a:fillRect/>
           </a:stretch>
@@ -23840,7 +24161,9 @@
         <p:txBody>
           <a:bodyPr wrap="square" lIns="0" tIns="0" rIns="0" bIns="0" rtlCol="0"/>
           <a:lstStyle/>
-          <a:p/>
+          <a:p>
+            <a:endParaRPr/>
+          </a:p>
         </p:txBody>
       </p:sp>
       <p:sp>
@@ -23986,7 +24309,9 @@
         <p:txBody>
           <a:bodyPr wrap="square" lIns="0" tIns="0" rIns="0" bIns="0" rtlCol="0"/>
           <a:lstStyle/>
-          <a:p/>
+          <a:p>
+            <a:endParaRPr/>
+          </a:p>
         </p:txBody>
       </p:sp>
       <p:sp>
@@ -24132,7 +24457,9 @@
         <p:txBody>
           <a:bodyPr wrap="square" lIns="0" tIns="0" rIns="0" bIns="0" rtlCol="0"/>
           <a:lstStyle/>
-          <a:p/>
+          <a:p>
+            <a:endParaRPr/>
+          </a:p>
         </p:txBody>
       </p:sp>
       <p:sp>
@@ -24278,7 +24605,9 @@
         <p:txBody>
           <a:bodyPr wrap="square" lIns="0" tIns="0" rIns="0" bIns="0" rtlCol="0"/>
           <a:lstStyle/>
-          <a:p/>
+          <a:p>
+            <a:endParaRPr/>
+          </a:p>
         </p:txBody>
       </p:sp>
       <p:sp>
@@ -24585,7 +24914,9 @@
           <p:txBody>
             <a:bodyPr wrap="square" lIns="0" tIns="0" rIns="0" bIns="0" rtlCol="0"/>
             <a:lstStyle/>
-            <a:p/>
+            <a:p>
+              <a:endParaRPr/>
+            </a:p>
           </p:txBody>
         </p:sp>
         <p:sp>
@@ -24731,7 +25062,9 @@
           <p:txBody>
             <a:bodyPr wrap="square" lIns="0" tIns="0" rIns="0" bIns="0" rtlCol="0"/>
             <a:lstStyle/>
-            <a:p/>
+            <a:p>
+              <a:endParaRPr/>
+            </a:p>
           </p:txBody>
         </p:sp>
       </p:grpSp>
@@ -24748,9 +25081,11 @@
         <p:spPr/>
         <p:txBody>
           <a:bodyPr/>
+          <a:lstStyle/>
           <a:p>
             <a:fld id="{B6F15528-21DE-4FAA-801E-634DDDAF4B2B}" type="slidenum">
               <a:rPr/>
+              <a:t>7</a:t>
             </a:fld>
             <a:endParaRPr/>
           </a:p>
@@ -24842,7 +25177,6 @@
               <a:rPr spc="-45" dirty="0"/>
               <a:t>Cluster</a:t>
             </a:r>
-            <a:endParaRPr spc="-45" dirty="0"/>
           </a:p>
         </p:txBody>
       </p:sp>
@@ -25075,7 +25409,9 @@
           <p:txBody>
             <a:bodyPr wrap="square" lIns="0" tIns="0" rIns="0" bIns="0" rtlCol="0"/>
             <a:lstStyle/>
-            <a:p/>
+            <a:p>
+              <a:endParaRPr/>
+            </a:p>
           </p:txBody>
         </p:sp>
         <p:sp>
@@ -25116,7 +25452,9 @@
           <p:txBody>
             <a:bodyPr wrap="square" lIns="0" tIns="0" rIns="0" bIns="0" rtlCol="0"/>
             <a:lstStyle/>
-            <a:p/>
+            <a:p>
+              <a:endParaRPr/>
+            </a:p>
           </p:txBody>
         </p:sp>
         <p:sp>
@@ -25157,7 +25495,9 @@
           <p:txBody>
             <a:bodyPr wrap="square" lIns="0" tIns="0" rIns="0" bIns="0" rtlCol="0"/>
             <a:lstStyle/>
-            <a:p/>
+            <a:p>
+              <a:endParaRPr/>
+            </a:p>
           </p:txBody>
         </p:sp>
         <p:sp>
@@ -25198,7 +25538,9 @@
           <p:txBody>
             <a:bodyPr wrap="square" lIns="0" tIns="0" rIns="0" bIns="0" rtlCol="0"/>
             <a:lstStyle/>
-            <a:p/>
+            <a:p>
+              <a:endParaRPr/>
+            </a:p>
           </p:txBody>
         </p:sp>
         <p:sp>
@@ -25239,7 +25581,9 @@
           <p:txBody>
             <a:bodyPr wrap="square" lIns="0" tIns="0" rIns="0" bIns="0" rtlCol="0"/>
             <a:lstStyle/>
-            <a:p/>
+            <a:p>
+              <a:endParaRPr/>
+            </a:p>
           </p:txBody>
         </p:sp>
         <p:sp>
@@ -25280,7 +25624,9 @@
           <p:txBody>
             <a:bodyPr wrap="square" lIns="0" tIns="0" rIns="0" bIns="0" rtlCol="0"/>
             <a:lstStyle/>
-            <a:p/>
+            <a:p>
+              <a:endParaRPr/>
+            </a:p>
           </p:txBody>
         </p:sp>
         <p:sp>
@@ -25330,7 +25676,9 @@
           <p:txBody>
             <a:bodyPr wrap="square" lIns="0" tIns="0" rIns="0" bIns="0" rtlCol="0"/>
             <a:lstStyle/>
-            <a:p/>
+            <a:p>
+              <a:endParaRPr/>
+            </a:p>
           </p:txBody>
         </p:sp>
       </p:grpSp>
@@ -25341,7 +25689,7 @@
           <p:nvPr/>
         </p:nvPicPr>
         <p:blipFill>
-          <a:blip r:embed="rId1" cstate="print"/>
+          <a:blip r:embed="rId2" cstate="print"/>
           <a:stretch>
             <a:fillRect/>
           </a:stretch>
@@ -25363,7 +25711,7 @@
           <p:nvPr/>
         </p:nvPicPr>
         <p:blipFill>
-          <a:blip r:embed="rId1" cstate="print"/>
+          <a:blip r:embed="rId2" cstate="print"/>
           <a:stretch>
             <a:fillRect/>
           </a:stretch>
@@ -25385,7 +25733,7 @@
           <p:nvPr/>
         </p:nvPicPr>
         <p:blipFill>
-          <a:blip r:embed="rId1" cstate="print"/>
+          <a:blip r:embed="rId2" cstate="print"/>
           <a:stretch>
             <a:fillRect/>
           </a:stretch>
@@ -25407,7 +25755,7 @@
           <p:nvPr/>
         </p:nvPicPr>
         <p:blipFill>
-          <a:blip r:embed="rId1" cstate="print"/>
+          <a:blip r:embed="rId2" cstate="print"/>
           <a:stretch>
             <a:fillRect/>
           </a:stretch>
@@ -25429,7 +25777,7 @@
           <p:nvPr/>
         </p:nvPicPr>
         <p:blipFill>
-          <a:blip r:embed="rId1" cstate="print"/>
+          <a:blip r:embed="rId2" cstate="print"/>
           <a:stretch>
             <a:fillRect/>
           </a:stretch>
@@ -25451,7 +25799,7 @@
           <p:nvPr/>
         </p:nvPicPr>
         <p:blipFill>
-          <a:blip r:embed="rId1" cstate="print"/>
+          <a:blip r:embed="rId2" cstate="print"/>
           <a:stretch>
             <a:fillRect/>
           </a:stretch>
@@ -25609,7 +25957,9 @@
         <p:txBody>
           <a:bodyPr wrap="square" lIns="0" tIns="0" rIns="0" bIns="0" rtlCol="0"/>
           <a:lstStyle/>
-          <a:p/>
+          <a:p>
+            <a:endParaRPr/>
+          </a:p>
         </p:txBody>
       </p:sp>
       <p:sp>
@@ -25755,7 +26105,9 @@
         <p:txBody>
           <a:bodyPr wrap="square" lIns="0" tIns="0" rIns="0" bIns="0" rtlCol="0"/>
           <a:lstStyle/>
-          <a:p/>
+          <a:p>
+            <a:endParaRPr/>
+          </a:p>
         </p:txBody>
       </p:sp>
       <p:sp>
@@ -26205,7 +26557,9 @@
           <p:txBody>
             <a:bodyPr wrap="square" lIns="0" tIns="0" rIns="0" bIns="0" rtlCol="0"/>
             <a:lstStyle/>
-            <a:p/>
+            <a:p>
+              <a:endParaRPr/>
+            </a:p>
           </p:txBody>
         </p:sp>
         <p:sp>
@@ -26351,7 +26705,9 @@
           <p:txBody>
             <a:bodyPr wrap="square" lIns="0" tIns="0" rIns="0" bIns="0" rtlCol="0"/>
             <a:lstStyle/>
-            <a:p/>
+            <a:p>
+              <a:endParaRPr/>
+            </a:p>
           </p:txBody>
         </p:sp>
       </p:grpSp>
@@ -26433,9 +26789,11 @@
         <p:spPr/>
         <p:txBody>
           <a:bodyPr/>
+          <a:lstStyle/>
           <a:p>
             <a:fld id="{B6F15528-21DE-4FAA-801E-634DDDAF4B2B}" type="slidenum">
               <a:rPr/>
+              <a:t>8</a:t>
             </a:fld>
             <a:endParaRPr/>
           </a:p>
@@ -26527,7 +26885,6 @@
               <a:rPr spc="-45" dirty="0"/>
               <a:t>Cluster</a:t>
             </a:r>
-            <a:endParaRPr spc="-45" dirty="0"/>
           </a:p>
         </p:txBody>
       </p:sp>
@@ -26760,7 +27117,9 @@
           <p:txBody>
             <a:bodyPr wrap="square" lIns="0" tIns="0" rIns="0" bIns="0" rtlCol="0"/>
             <a:lstStyle/>
-            <a:p/>
+            <a:p>
+              <a:endParaRPr/>
+            </a:p>
           </p:txBody>
         </p:sp>
         <p:sp>
@@ -26801,7 +27160,9 @@
           <p:txBody>
             <a:bodyPr wrap="square" lIns="0" tIns="0" rIns="0" bIns="0" rtlCol="0"/>
             <a:lstStyle/>
-            <a:p/>
+            <a:p>
+              <a:endParaRPr/>
+            </a:p>
           </p:txBody>
         </p:sp>
         <p:sp>
@@ -26842,7 +27203,9 @@
           <p:txBody>
             <a:bodyPr wrap="square" lIns="0" tIns="0" rIns="0" bIns="0" rtlCol="0"/>
             <a:lstStyle/>
-            <a:p/>
+            <a:p>
+              <a:endParaRPr/>
+            </a:p>
           </p:txBody>
         </p:sp>
         <p:sp>
@@ -26883,7 +27246,9 @@
           <p:txBody>
             <a:bodyPr wrap="square" lIns="0" tIns="0" rIns="0" bIns="0" rtlCol="0"/>
             <a:lstStyle/>
-            <a:p/>
+            <a:p>
+              <a:endParaRPr/>
+            </a:p>
           </p:txBody>
         </p:sp>
         <p:sp>
@@ -26924,7 +27289,9 @@
           <p:txBody>
             <a:bodyPr wrap="square" lIns="0" tIns="0" rIns="0" bIns="0" rtlCol="0"/>
             <a:lstStyle/>
-            <a:p/>
+            <a:p>
+              <a:endParaRPr/>
+            </a:p>
           </p:txBody>
         </p:sp>
         <p:sp>
@@ -26965,7 +27332,9 @@
           <p:txBody>
             <a:bodyPr wrap="square" lIns="0" tIns="0" rIns="0" bIns="0" rtlCol="0"/>
             <a:lstStyle/>
-            <a:p/>
+            <a:p>
+              <a:endParaRPr/>
+            </a:p>
           </p:txBody>
         </p:sp>
         <p:sp>
@@ -27015,7 +27384,9 @@
           <p:txBody>
             <a:bodyPr wrap="square" lIns="0" tIns="0" rIns="0" bIns="0" rtlCol="0"/>
             <a:lstStyle/>
-            <a:p/>
+            <a:p>
+              <a:endParaRPr/>
+            </a:p>
           </p:txBody>
         </p:sp>
       </p:grpSp>
@@ -27026,7 +27397,7 @@
           <p:nvPr/>
         </p:nvPicPr>
         <p:blipFill>
-          <a:blip r:embed="rId1" cstate="print"/>
+          <a:blip r:embed="rId2" cstate="print"/>
           <a:stretch>
             <a:fillRect/>
           </a:stretch>
@@ -27048,7 +27419,7 @@
           <p:nvPr/>
         </p:nvPicPr>
         <p:blipFill>
-          <a:blip r:embed="rId1" cstate="print"/>
+          <a:blip r:embed="rId2" cstate="print"/>
           <a:stretch>
             <a:fillRect/>
           </a:stretch>
@@ -27070,7 +27441,7 @@
           <p:nvPr/>
         </p:nvPicPr>
         <p:blipFill>
-          <a:blip r:embed="rId1" cstate="print"/>
+          <a:blip r:embed="rId2" cstate="print"/>
           <a:stretch>
             <a:fillRect/>
           </a:stretch>
@@ -27092,7 +27463,7 @@
           <p:nvPr/>
         </p:nvPicPr>
         <p:blipFill>
-          <a:blip r:embed="rId1" cstate="print"/>
+          <a:blip r:embed="rId2" cstate="print"/>
           <a:stretch>
             <a:fillRect/>
           </a:stretch>
@@ -27114,7 +27485,7 @@
           <p:nvPr/>
         </p:nvPicPr>
         <p:blipFill>
-          <a:blip r:embed="rId1" cstate="print"/>
+          <a:blip r:embed="rId2" cstate="print"/>
           <a:stretch>
             <a:fillRect/>
           </a:stretch>
@@ -27136,7 +27507,7 @@
           <p:nvPr/>
         </p:nvPicPr>
         <p:blipFill>
-          <a:blip r:embed="rId1" cstate="print"/>
+          <a:blip r:embed="rId2" cstate="print"/>
           <a:stretch>
             <a:fillRect/>
           </a:stretch>
@@ -27294,7 +27665,9 @@
         <p:txBody>
           <a:bodyPr wrap="square" lIns="0" tIns="0" rIns="0" bIns="0" rtlCol="0"/>
           <a:lstStyle/>
-          <a:p/>
+          <a:p>
+            <a:endParaRPr/>
+          </a:p>
         </p:txBody>
       </p:sp>
       <p:sp>
@@ -27684,7 +28057,9 @@
           <p:txBody>
             <a:bodyPr wrap="square" lIns="0" tIns="0" rIns="0" bIns="0" rtlCol="0"/>
             <a:lstStyle/>
-            <a:p/>
+            <a:p>
+              <a:endParaRPr/>
+            </a:p>
           </p:txBody>
         </p:sp>
         <p:sp>
@@ -27830,7 +28205,9 @@
           <p:txBody>
             <a:bodyPr wrap="square" lIns="0" tIns="0" rIns="0" bIns="0" rtlCol="0"/>
             <a:lstStyle/>
-            <a:p/>
+            <a:p>
+              <a:endParaRPr/>
+            </a:p>
           </p:txBody>
         </p:sp>
         <p:sp>
@@ -27878,7 +28255,9 @@
           <p:txBody>
             <a:bodyPr wrap="square" lIns="0" tIns="0" rIns="0" bIns="0" rtlCol="0"/>
             <a:lstStyle/>
-            <a:p/>
+            <a:p>
+              <a:endParaRPr/>
+            </a:p>
           </p:txBody>
         </p:sp>
         <p:sp>
@@ -27928,7 +28307,9 @@
           <p:txBody>
             <a:bodyPr wrap="square" lIns="0" tIns="0" rIns="0" bIns="0" rtlCol="0"/>
             <a:lstStyle/>
-            <a:p/>
+            <a:p>
+              <a:endParaRPr/>
+            </a:p>
           </p:txBody>
         </p:sp>
       </p:grpSp>
@@ -28037,7 +28418,9 @@
           <p:txBody>
             <a:bodyPr wrap="square" lIns="0" tIns="0" rIns="0" bIns="0" rtlCol="0"/>
             <a:lstStyle/>
-            <a:p/>
+            <a:p>
+              <a:endParaRPr/>
+            </a:p>
           </p:txBody>
         </p:sp>
         <p:sp>
@@ -28087,7 +28470,9 @@
           <p:txBody>
             <a:bodyPr wrap="square" lIns="0" tIns="0" rIns="0" bIns="0" rtlCol="0"/>
             <a:lstStyle/>
-            <a:p/>
+            <a:p>
+              <a:endParaRPr/>
+            </a:p>
           </p:txBody>
         </p:sp>
       </p:grpSp>
@@ -28144,7 +28529,7 @@
           <p:nvPr/>
         </p:nvPicPr>
         <p:blipFill>
-          <a:blip r:embed="rId2" cstate="print"/>
+          <a:blip r:embed="rId3" cstate="print"/>
           <a:stretch>
             <a:fillRect/>
           </a:stretch>
@@ -28172,9 +28557,11 @@
         <p:spPr/>
         <p:txBody>
           <a:bodyPr/>
+          <a:lstStyle/>
           <a:p>
             <a:fld id="{B6F15528-21DE-4FAA-801E-634DDDAF4B2B}" type="slidenum">
               <a:rPr/>
+              <a:t>9</a:t>
             </a:fld>
             <a:endParaRPr/>
           </a:p>
@@ -28466,6 +28853,8 @@
       </a:bgFillStyleLst>
     </a:fmtScheme>
   </a:themeElements>
+  <a:objectDefaults/>
+  <a:extraClrSchemeLst/>
   <a:extLst>
     <a:ext uri="{05A4C25C-085E-4340-85A3-A5531E510DB2}">
       <thm15:themeFamily xmlns:thm15="http://schemas.microsoft.com/office/thememl/2012/main" name="Office Theme" id="{62F939B6-93AF-4DB8-9C6B-D6C7DFDC589F}" vid="{4A3C46E8-61CC-4603-A589-7422A47A8E4A}"/>
@@ -28725,6 +29114,8 @@
       </a:bgFillStyleLst>
     </a:fmtScheme>
   </a:themeElements>
+  <a:objectDefaults/>
+  <a:extraClrSchemeLst/>
   <a:extLst>
     <a:ext uri="{05A4C25C-085E-4340-85A3-A5531E510DB2}">
       <thm15:themeFamily xmlns:thm15="http://schemas.microsoft.com/office/thememl/2012/main" name="Office Theme" id="{62F939B6-93AF-4DB8-9C6B-D6C7DFDC589F}" vid="{4A3C46E8-61CC-4603-A589-7422A47A8E4A}"/>
